--- a/preview_v7/bio/l-bio-sx2-u3-1.pptx
+++ b/preview_v7/bio/l-bio-sx2-u3-1.pptx
@@ -3142,177 +3142,14 @@
       </p:sp>
       <p:sp>
         <p:nvSpPr>
-          <p:cNvPr id="3" name="TextBox 2"/>
-          <p:cNvSpPr txBox="1"/>
-          <p:nvPr/>
-        </p:nvSpPr>
-        <p:spPr>
-          <a:xfrm>
-            <a:off x="640080" y="640080"/>
-            <a:ext cx="10911535" cy="502920"/>
-          </a:xfrm>
-          <a:prstGeom prst="rect">
-            <a:avLst/>
-          </a:prstGeom>
-          <a:noFill/>
-        </p:spPr>
-        <p:txBody>
-          <a:bodyPr wrap="square" anchor="t" lIns="0" rIns="0" tIns="0" bIns="0">
-            <a:spAutoFit/>
-          </a:bodyPr>
-          <a:lstStyle/>
-          <a:p>
-            <a:pPr algn="l">
-              <a:spcAft>
-                <a:spcPts val="0"/>
-              </a:spcAft>
-            </a:pPr>
-            <a:r>
-              <a:rPr sz="1200" b="1">
-                <a:solidFill>
-                  <a:srgbClr val="B23A2A"/>
-                </a:solidFill>
-                <a:latin typeface="微软雅黑"/>
-                <a:ea typeface="微软雅黑"/>
-                <a:cs typeface="微软雅黑"/>
-              </a:rPr>
-              <a:t>生物 · 选择性必修2 生物与环境 · 第3单元 生态系统及其稳定性</a:t>
-            </a:r>
-          </a:p>
-        </p:txBody>
-      </p:sp>
-      <p:sp>
-        <p:nvSpPr>
-          <p:cNvPr id="4" name="Rectangle 3"/>
+          <p:cNvPr id="3" name="Rectangle 2"/>
           <p:cNvSpPr/>
           <p:nvPr/>
         </p:nvSpPr>
         <p:spPr>
           <a:xfrm>
-            <a:off x="640080" y="1207008"/>
-            <a:ext cx="822960" cy="30480"/>
-          </a:xfrm>
-          <a:prstGeom prst="rect">
-            <a:avLst/>
-          </a:prstGeom>
-          <a:solidFill>
-            <a:srgbClr val="B23A2A"/>
-          </a:solidFill>
-          <a:ln>
-            <a:noFill/>
-          </a:ln>
-          <a:effectLst/>
-        </p:spPr>
-        <p:style>
-          <a:lnRef idx="1">
-            <a:schemeClr val="accent1"/>
-          </a:lnRef>
-          <a:fillRef idx="3">
-            <a:schemeClr val="accent1"/>
-          </a:fillRef>
-          <a:effectRef idx="2">
-            <a:schemeClr val="accent1"/>
-          </a:effectRef>
-          <a:fontRef idx="minor">
-            <a:schemeClr val="lt1"/>
-          </a:fontRef>
-        </p:style>
-        <p:txBody>
-          <a:bodyPr rtlCol="0" anchor="ctr"/>
-          <a:lstStyle/>
-          <a:p>
-            <a:pPr algn="ctr"/>
-          </a:p>
-        </p:txBody>
-      </p:sp>
-      <p:sp>
-        <p:nvSpPr>
-          <p:cNvPr id="5" name="TextBox 4"/>
-          <p:cNvSpPr txBox="1"/>
-          <p:nvPr/>
-        </p:nvSpPr>
-        <p:spPr>
-          <a:xfrm>
-            <a:off x="640080" y="1737360"/>
-            <a:ext cx="10911535" cy="2011680"/>
-          </a:xfrm>
-          <a:prstGeom prst="rect">
-            <a:avLst/>
-          </a:prstGeom>
-          <a:noFill/>
-        </p:spPr>
-        <p:txBody>
-          <a:bodyPr wrap="square" anchor="t" lIns="0" rIns="0" tIns="0" bIns="0">
-            <a:spAutoFit/>
-          </a:bodyPr>
-          <a:lstStyle/>
-          <a:p>
-            <a:pPr algn="l">
-              <a:lnSpc>
-                <a:spcPct val="115000"/>
-              </a:lnSpc>
-            </a:pPr>
-            <a:r>
-              <a:rPr sz="4000" b="1">
-                <a:solidFill>
-                  <a:srgbClr val="1C2A33"/>
-                </a:solidFill>
-                <a:latin typeface="楷体"/>
-                <a:ea typeface="楷体"/>
-                <a:cs typeface="楷体"/>
-              </a:rPr>
-              <a:t>生态系统的结构</a:t>
-            </a:r>
-          </a:p>
-        </p:txBody>
-      </p:sp>
-      <p:sp>
-        <p:nvSpPr>
-          <p:cNvPr id="6" name="TextBox 5"/>
-          <p:cNvSpPr txBox="1"/>
-          <p:nvPr/>
-        </p:nvSpPr>
-        <p:spPr>
-          <a:xfrm>
-            <a:off x="640080" y="3840480"/>
-            <a:ext cx="10911535" cy="457200"/>
-          </a:xfrm>
-          <a:prstGeom prst="rect">
-            <a:avLst/>
-          </a:prstGeom>
-          <a:noFill/>
-        </p:spPr>
-        <p:txBody>
-          <a:bodyPr wrap="square" anchor="t" lIns="0" rIns="0" tIns="0" bIns="0">
-            <a:spAutoFit/>
-          </a:bodyPr>
-          <a:lstStyle/>
-          <a:p>
-            <a:pPr algn="l"/>
-            <a:r>
-              <a:rPr sz="1700" b="1">
-                <a:solidFill>
-                  <a:srgbClr val="B23A2A"/>
-                </a:solidFill>
-                <a:latin typeface="微软雅黑"/>
-                <a:ea typeface="微软雅黑"/>
-                <a:cs typeface="微软雅黑"/>
-              </a:rPr>
-              <a:t>新课  ·  第1课时  ·  45分钟</a:t>
-            </a:r>
-          </a:p>
-        </p:txBody>
-      </p:sp>
-      <p:sp>
-        <p:nvSpPr>
-          <p:cNvPr id="7" name="Rectangle 6"/>
-          <p:cNvSpPr/>
-          <p:nvPr/>
-        </p:nvSpPr>
-        <p:spPr>
-          <a:xfrm>
-            <a:off x="640080" y="5394960"/>
-            <a:ext cx="2011680" cy="33020"/>
+            <a:off x="640080" y="960120"/>
+            <a:ext cx="822960" cy="38100"/>
           </a:xfrm>
           <a:prstGeom prst="rect">
             <a:avLst/>
@@ -3349,14 +3186,14 @@
       </p:sp>
       <p:sp>
         <p:nvSpPr>
-          <p:cNvPr id="8" name="TextBox 7"/>
+          <p:cNvPr id="4" name="TextBox 3"/>
           <p:cNvSpPr txBox="1"/>
           <p:nvPr/>
         </p:nvSpPr>
         <p:spPr>
           <a:xfrm>
-            <a:off x="640080" y="5623560"/>
-            <a:ext cx="10911535" cy="548640"/>
+            <a:off x="640080" y="1143000"/>
+            <a:ext cx="10972800" cy="457200"/>
           </a:xfrm>
           <a:prstGeom prst="rect">
             <a:avLst/>
@@ -3371,29 +3208,29 @@
           <a:p>
             <a:pPr algn="l"/>
             <a:r>
-              <a:rPr sz="1400" b="0">
-                <a:solidFill>
-                  <a:srgbClr val="6B6258"/>
+              <a:rPr sz="1500" b="1">
+                <a:solidFill>
+                  <a:srgbClr val="2E7D6B"/>
                 </a:solidFill>
                 <a:latin typeface="微软雅黑"/>
                 <a:ea typeface="微软雅黑"/>
                 <a:cs typeface="微软雅黑"/>
               </a:rPr>
-              <a:t>学习任务群：    |    年级：高二</a:t>
-            </a:r>
-          </a:p>
-        </p:txBody>
-      </p:sp>
-      <p:sp>
-        <p:nvSpPr>
-          <p:cNvPr id="9" name="TextBox 8"/>
+              <a:t>选择性必修2 生物与环境 · 生态系统及其稳定性 · 第1课时</a:t>
+            </a:r>
+          </a:p>
+        </p:txBody>
+      </p:sp>
+      <p:sp>
+        <p:nvSpPr>
+          <p:cNvPr id="5" name="TextBox 4"/>
           <p:cNvSpPr txBox="1"/>
           <p:nvPr/>
         </p:nvSpPr>
         <p:spPr>
           <a:xfrm>
-            <a:off x="11002975" y="6355080"/>
-            <a:ext cx="731520" cy="320040"/>
+            <a:off x="640080" y="1600200"/>
+            <a:ext cx="11155680" cy="1554480"/>
           </a:xfrm>
           <a:prstGeom prst="rect">
             <a:avLst/>
@@ -3406,11 +3243,299 @@
           </a:bodyPr>
           <a:lstStyle/>
           <a:p>
+            <a:pPr algn="l">
+              <a:lnSpc>
+                <a:spcPct val="115000"/>
+              </a:lnSpc>
+            </a:pPr>
+            <a:r>
+              <a:rPr sz="4000" b="1">
+                <a:solidFill>
+                  <a:srgbClr val="1C2A33"/>
+                </a:solidFill>
+                <a:latin typeface="楷体"/>
+                <a:ea typeface="楷体"/>
+                <a:cs typeface="楷体"/>
+              </a:rPr>
+              <a:t>生态系统的结构</a:t>
+            </a:r>
+          </a:p>
+        </p:txBody>
+      </p:sp>
+      <p:sp>
+        <p:nvSpPr>
+          <p:cNvPr id="6" name="TextBox 5"/>
+          <p:cNvSpPr txBox="1"/>
+          <p:nvPr/>
+        </p:nvSpPr>
+        <p:spPr>
+          <a:xfrm>
+            <a:off x="640080" y="3246120"/>
+            <a:ext cx="10789920" cy="1005840"/>
+          </a:xfrm>
+          <a:prstGeom prst="rect">
+            <a:avLst/>
+          </a:prstGeom>
+          <a:noFill/>
+        </p:spPr>
+        <p:txBody>
+          <a:bodyPr wrap="square" anchor="t" lIns="0" rIns="0" tIns="0" bIns="0">
+            <a:spAutoFit/>
+          </a:bodyPr>
+          <a:lstStyle/>
+          <a:p>
+            <a:pPr algn="l">
+              <a:lnSpc>
+                <a:spcPct val="150000"/>
+              </a:lnSpc>
+            </a:pPr>
+            <a:r>
+              <a:rPr sz="1600" b="0">
+                <a:solidFill>
+                  <a:srgbClr val="6B6258"/>
+                </a:solidFill>
+                <a:latin typeface="楷体"/>
+                <a:ea typeface="楷体"/>
+                <a:cs typeface="楷体"/>
+              </a:rPr>
+              <a:t>生态系统由生物群落与无机环境相互作用形成。组成成分包括非生物的物质和能量、生产者、消…</a:t>
+            </a:r>
+          </a:p>
+        </p:txBody>
+      </p:sp>
+      <p:sp>
+        <p:nvSpPr>
+          <p:cNvPr id="7" name="TextBox 6"/>
+          <p:cNvSpPr txBox="1"/>
+          <p:nvPr/>
+        </p:nvSpPr>
+        <p:spPr>
+          <a:xfrm>
+            <a:off x="640080" y="4343400"/>
+            <a:ext cx="10789920" cy="457200"/>
+          </a:xfrm>
+          <a:prstGeom prst="rect">
+            <a:avLst/>
+          </a:prstGeom>
+          <a:noFill/>
+        </p:spPr>
+        <p:txBody>
+          <a:bodyPr wrap="square" anchor="t" lIns="0" rIns="0" tIns="0" bIns="0">
+            <a:spAutoFit/>
+          </a:bodyPr>
+          <a:lstStyle/>
+          <a:p>
+            <a:pPr algn="l"/>
+            <a:r>
+              <a:rPr sz="1250" b="0">
+                <a:solidFill>
+                  <a:srgbClr val="6B6258"/>
+                </a:solidFill>
+                <a:latin typeface="微软雅黑"/>
+                <a:ea typeface="微软雅黑"/>
+                <a:cs typeface="微软雅黑"/>
+              </a:rPr>
+              <a:t>标签：生态系统 · 组成成分 · 生产者 · 食物链 · 营养级</a:t>
+            </a:r>
+          </a:p>
+        </p:txBody>
+      </p:sp>
+      <p:sp>
+        <p:nvSpPr>
+          <p:cNvPr id="8" name="Rectangle 7"/>
+          <p:cNvSpPr/>
+          <p:nvPr/>
+        </p:nvSpPr>
+        <p:spPr>
+          <a:xfrm>
+            <a:off x="0" y="5897880"/>
+            <a:ext cx="12191695" cy="960120"/>
+          </a:xfrm>
+          <a:prstGeom prst="rect">
+            <a:avLst/>
+          </a:prstGeom>
+          <a:solidFill>
+            <a:srgbClr val="2E7D6B"/>
+          </a:solidFill>
+          <a:ln>
+            <a:noFill/>
+          </a:ln>
+          <a:effectLst/>
+        </p:spPr>
+        <p:style>
+          <a:lnRef idx="1">
+            <a:schemeClr val="accent1"/>
+          </a:lnRef>
+          <a:fillRef idx="3">
+            <a:schemeClr val="accent1"/>
+          </a:fillRef>
+          <a:effectRef idx="2">
+            <a:schemeClr val="accent1"/>
+          </a:effectRef>
+          <a:fontRef idx="minor">
+            <a:schemeClr val="lt1"/>
+          </a:fontRef>
+        </p:style>
+        <p:txBody>
+          <a:bodyPr rtlCol="0" anchor="ctr"/>
+          <a:lstStyle/>
+          <a:p>
+            <a:pPr algn="ctr"/>
+          </a:p>
+        </p:txBody>
+      </p:sp>
+      <p:sp>
+        <p:nvSpPr>
+          <p:cNvPr id="9" name="TextBox 8"/>
+          <p:cNvSpPr txBox="1"/>
+          <p:nvPr/>
+        </p:nvSpPr>
+        <p:spPr>
+          <a:xfrm>
+            <a:off x="640080" y="6016752"/>
+            <a:ext cx="7315200" cy="731520"/>
+          </a:xfrm>
+          <a:prstGeom prst="rect">
+            <a:avLst/>
+          </a:prstGeom>
+          <a:noFill/>
+        </p:spPr>
+        <p:txBody>
+          <a:bodyPr wrap="square" anchor="t" lIns="0" rIns="0" tIns="0" bIns="0">
+            <a:spAutoFit/>
+          </a:bodyPr>
+          <a:lstStyle/>
+          <a:p>
+            <a:pPr algn="l"/>
+            <a:r>
+              <a:rPr sz="1800" b="1">
+                <a:solidFill>
+                  <a:srgbClr val="FFFFFF"/>
+                </a:solidFill>
+                <a:latin typeface="微软雅黑"/>
+                <a:ea typeface="微软雅黑"/>
+                <a:cs typeface="微软雅黑"/>
+              </a:rPr>
+              <a:t>高中生物 · 学生版课堂</a:t>
+            </a:r>
+          </a:p>
+          <a:p>
+            <a:pPr algn="l"/>
+            <a:r>
+              <a:rPr sz="1200" b="0">
+                <a:solidFill>
+                  <a:srgbClr val="E7DFD2"/>
+                </a:solidFill>
+                <a:latin typeface="微软雅黑"/>
+                <a:ea typeface="微软雅黑"/>
+                <a:cs typeface="微软雅黑"/>
+              </a:rPr>
+              <a:t>植物生命活动调节 / 生物与环境</a:t>
+            </a:r>
+          </a:p>
+        </p:txBody>
+      </p:sp>
+      <p:sp>
+        <p:nvSpPr>
+          <p:cNvPr id="10" name="TextBox 9"/>
+          <p:cNvSpPr txBox="1"/>
+          <p:nvPr/>
+        </p:nvSpPr>
+        <p:spPr>
+          <a:xfrm>
+            <a:off x="8534095" y="6108192"/>
+            <a:ext cx="3017520" cy="548640"/>
+          </a:xfrm>
+          <a:prstGeom prst="rect">
+            <a:avLst/>
+          </a:prstGeom>
+          <a:noFill/>
+        </p:spPr>
+        <p:txBody>
+          <a:bodyPr wrap="square" anchor="t" lIns="0" rIns="0" tIns="0" bIns="0">
+            <a:spAutoFit/>
+          </a:bodyPr>
+          <a:lstStyle/>
+          <a:p>
             <a:pPr algn="r"/>
             <a:r>
+              <a:rPr sz="2200" b="1">
+                <a:solidFill>
+                  <a:srgbClr val="FFFFFF"/>
+                </a:solidFill>
+                <a:latin typeface="楷体"/>
+                <a:ea typeface="楷体"/>
+                <a:cs typeface="楷体"/>
+              </a:rPr>
+              <a:t>第1课时</a:t>
+            </a:r>
+          </a:p>
+        </p:txBody>
+      </p:sp>
+      <p:sp>
+        <p:nvSpPr>
+          <p:cNvPr id="11" name="TextBox 10"/>
+          <p:cNvSpPr txBox="1"/>
+          <p:nvPr/>
+        </p:nvSpPr>
+        <p:spPr>
+          <a:xfrm>
+            <a:off x="640080" y="6400800"/>
+            <a:ext cx="7498079" cy="365760"/>
+          </a:xfrm>
+          <a:prstGeom prst="rect">
+            <a:avLst/>
+          </a:prstGeom>
+          <a:noFill/>
+        </p:spPr>
+        <p:txBody>
+          <a:bodyPr wrap="square" anchor="t" lIns="0" rIns="0" tIns="0" bIns="0">
+            <a:spAutoFit/>
+          </a:bodyPr>
+          <a:lstStyle/>
+          <a:p>
+            <a:pPr algn="ctr"/>
+            <a:r>
               <a:rPr sz="1100" b="0">
                 <a:solidFill>
                   <a:srgbClr val="6B6258"/>
+                </a:solidFill>
+                <a:latin typeface="微软雅黑"/>
+                <a:ea typeface="微软雅黑"/>
+                <a:cs typeface="微软雅黑"/>
+              </a:rPr>
+              <a:t>本课件未使用无关配图，采用学科色块兜底（生物·湘碧）。</a:t>
+            </a:r>
+          </a:p>
+        </p:txBody>
+      </p:sp>
+      <p:sp>
+        <p:nvSpPr>
+          <p:cNvPr id="12" name="TextBox 11"/>
+          <p:cNvSpPr txBox="1"/>
+          <p:nvPr/>
+        </p:nvSpPr>
+        <p:spPr>
+          <a:xfrm>
+            <a:off x="11002975" y="6355080"/>
+            <a:ext cx="731520" cy="320040"/>
+          </a:xfrm>
+          <a:prstGeom prst="rect">
+            <a:avLst/>
+          </a:prstGeom>
+          <a:noFill/>
+        </p:spPr>
+        <p:txBody>
+          <a:bodyPr wrap="square" anchor="t" lIns="0" rIns="0" tIns="0" bIns="0">
+            <a:spAutoFit/>
+          </a:bodyPr>
+          <a:lstStyle/>
+          <a:p>
+            <a:pPr algn="r"/>
+            <a:r>
+              <a:rPr sz="1100" b="0">
+                <a:solidFill>
+                  <a:srgbClr val="FFFFFF"/>
                 </a:solidFill>
                 <a:latin typeface="微软雅黑"/>
                 <a:ea typeface="微软雅黑"/>
@@ -3570,14 +3695,51 @@
       </p:sp>
       <p:sp>
         <p:nvSpPr>
-          <p:cNvPr id="5" name="Rounded Rectangle 4"/>
+          <p:cNvPr id="5" name="TextBox 4"/>
+          <p:cNvSpPr txBox="1"/>
+          <p:nvPr/>
+        </p:nvSpPr>
+        <p:spPr>
+          <a:xfrm>
+            <a:off x="640080" y="1298448"/>
+            <a:ext cx="10789920" cy="640080"/>
+          </a:xfrm>
+          <a:prstGeom prst="rect">
+            <a:avLst/>
+          </a:prstGeom>
+          <a:noFill/>
+        </p:spPr>
+        <p:txBody>
+          <a:bodyPr wrap="square" anchor="t" lIns="0" rIns="0" tIns="0" bIns="0">
+            <a:spAutoFit/>
+          </a:bodyPr>
+          <a:lstStyle/>
+          <a:p>
+            <a:pPr algn="l"/>
+            <a:r>
+              <a:rPr sz="3000" b="1">
+                <a:solidFill>
+                  <a:srgbClr val="1C2A33"/>
+                </a:solidFill>
+                <a:latin typeface="楷体"/>
+                <a:ea typeface="楷体"/>
+                <a:cs typeface="楷体"/>
+              </a:rPr>
+              <a:t>四向学习目标</a:t>
+            </a:r>
+          </a:p>
+        </p:txBody>
+      </p:sp>
+      <p:sp>
+        <p:nvSpPr>
+          <p:cNvPr id="6" name="Rounded Rectangle 5"/>
           <p:cNvSpPr/>
           <p:nvPr/>
         </p:nvSpPr>
         <p:spPr>
           <a:xfrm>
-            <a:off x="640080" y="1417320"/>
-            <a:ext cx="5349240" cy="2057400"/>
+            <a:off x="640080" y="2148840"/>
+            <a:ext cx="5295747" cy="1965960"/>
           </a:xfrm>
           <a:prstGeom prst="roundRect">
             <a:avLst/>
@@ -3585,7 +3747,7 @@
           <a:solidFill>
             <a:srgbClr val="FFFFFF"/>
           </a:solidFill>
-          <a:ln w="22860">
+          <a:ln w="20320">
             <a:solidFill>
               <a:srgbClr val="B23A2A"/>
             </a:solidFill>
@@ -3616,14 +3778,14 @@
       </p:sp>
       <p:sp>
         <p:nvSpPr>
-          <p:cNvPr id="6" name="Oval 5"/>
+          <p:cNvPr id="7" name="Oval 6"/>
           <p:cNvSpPr/>
           <p:nvPr/>
         </p:nvSpPr>
         <p:spPr>
           <a:xfrm>
-            <a:off x="804672" y="1581912"/>
-            <a:ext cx="457200" cy="457200"/>
+            <a:off x="868680" y="2377440"/>
+            <a:ext cx="548640" cy="548640"/>
           </a:xfrm>
           <a:prstGeom prst="ellipse">
             <a:avLst/>
@@ -3660,14 +3822,14 @@
       </p:sp>
       <p:sp>
         <p:nvSpPr>
-          <p:cNvPr id="7" name="TextBox 6"/>
+          <p:cNvPr id="8" name="TextBox 7"/>
           <p:cNvSpPr txBox="1"/>
           <p:nvPr/>
         </p:nvSpPr>
         <p:spPr>
           <a:xfrm>
-            <a:off x="804672" y="1636776"/>
-            <a:ext cx="457200" cy="384048"/>
+            <a:off x="868680" y="2441448"/>
+            <a:ext cx="548640" cy="411480"/>
           </a:xfrm>
           <a:prstGeom prst="rect">
             <a:avLst/>
@@ -3682,7 +3844,7 @@
           <a:p>
             <a:pPr algn="ctr"/>
             <a:r>
-              <a:rPr sz="1600" b="1">
+              <a:rPr sz="2000" b="1">
                 <a:solidFill>
                   <a:srgbClr val="FFFFFF"/>
                 </a:solidFill>
@@ -3697,14 +3859,14 @@
       </p:sp>
       <p:sp>
         <p:nvSpPr>
-          <p:cNvPr id="8" name="TextBox 7"/>
+          <p:cNvPr id="9" name="TextBox 8"/>
           <p:cNvSpPr txBox="1"/>
           <p:nvPr/>
         </p:nvSpPr>
         <p:spPr>
           <a:xfrm>
-            <a:off x="1371600" y="1527048"/>
-            <a:ext cx="4434840" cy="457200"/>
+            <a:off x="1554480" y="2404872"/>
+            <a:ext cx="4198467" cy="548640"/>
           </a:xfrm>
           <a:prstGeom prst="rect">
             <a:avLst/>
@@ -3717,35 +3879,31 @@
           </a:bodyPr>
           <a:lstStyle/>
           <a:p>
-            <a:pPr algn="l">
-              <a:lnSpc>
-                <a:spcPct val="110000"/>
-              </a:lnSpc>
-            </a:pPr>
-            <a:r>
-              <a:rPr sz="1600" b="1">
-                <a:solidFill>
-                  <a:srgbClr val="1C2A33"/>
+            <a:pPr algn="l"/>
+            <a:r>
+              <a:rPr sz="1700" b="1">
+                <a:solidFill>
+                  <a:srgbClr val="B23A2A"/>
                 </a:solidFill>
                 <a:latin typeface="微软雅黑"/>
                 <a:ea typeface="微软雅黑"/>
                 <a:cs typeface="微软雅黑"/>
               </a:rPr>
-              <a:t>目标</a:t>
-            </a:r>
-          </a:p>
-        </p:txBody>
-      </p:sp>
-      <p:sp>
-        <p:nvSpPr>
-          <p:cNvPr id="9" name="TextBox 8"/>
+              <a:t>生命观念</a:t>
+            </a:r>
+          </a:p>
+        </p:txBody>
+      </p:sp>
+      <p:sp>
+        <p:nvSpPr>
+          <p:cNvPr id="10" name="TextBox 9"/>
           <p:cNvSpPr txBox="1"/>
           <p:nvPr/>
         </p:nvSpPr>
         <p:spPr>
           <a:xfrm>
-            <a:off x="1371600" y="1965960"/>
-            <a:ext cx="4434840" cy="1417320"/>
+            <a:off x="914400" y="3108960"/>
+            <a:ext cx="4747107" cy="868680"/>
           </a:xfrm>
           <a:prstGeom prst="rect">
             <a:avLst/>
@@ -3760,11 +3918,11 @@
           <a:p>
             <a:pPr algn="l">
               <a:lnSpc>
-                <a:spcPct val="128000"/>
+                <a:spcPct val="150000"/>
               </a:lnSpc>
             </a:pPr>
             <a:r>
-              <a:rPr sz="1400" b="0">
+              <a:rPr sz="1350" b="0">
                 <a:solidFill>
                   <a:srgbClr val="1C2A33"/>
                 </a:solidFill>
@@ -3772,21 +3930,21 @@
                 <a:ea typeface="楷体"/>
                 <a:cs typeface="楷体"/>
               </a:rPr>
-              <a:t>生命观念：理解生态系统是生物与无机环境统一整体，认同结构决定功能。</a:t>
-            </a:r>
-          </a:p>
-        </p:txBody>
-      </p:sp>
-      <p:sp>
-        <p:nvSpPr>
-          <p:cNvPr id="10" name="Rounded Rectangle 9"/>
+              <a:t>理解生态系统是生物与无机环境统一整体，认同结构决定功能。</a:t>
+            </a:r>
+          </a:p>
+        </p:txBody>
+      </p:sp>
+      <p:sp>
+        <p:nvSpPr>
+          <p:cNvPr id="11" name="Rounded Rectangle 10"/>
           <p:cNvSpPr/>
           <p:nvPr/>
         </p:nvSpPr>
         <p:spPr>
           <a:xfrm>
-            <a:off x="6263640" y="1417320"/>
-            <a:ext cx="5349240" cy="2057400"/>
+            <a:off x="6255867" y="2148840"/>
+            <a:ext cx="5295747" cy="1965960"/>
           </a:xfrm>
           <a:prstGeom prst="roundRect">
             <a:avLst/>
@@ -3794,9 +3952,9 @@
           <a:solidFill>
             <a:srgbClr val="FFFFFF"/>
           </a:solidFill>
-          <a:ln w="22860">
+          <a:ln w="20320">
             <a:solidFill>
-              <a:srgbClr val="B23A2A"/>
+              <a:srgbClr val="2E7D6B"/>
             </a:solidFill>
           </a:ln>
           <a:effectLst/>
@@ -3825,20 +3983,20 @@
       </p:sp>
       <p:sp>
         <p:nvSpPr>
-          <p:cNvPr id="11" name="Oval 10"/>
+          <p:cNvPr id="12" name="Oval 11"/>
           <p:cNvSpPr/>
           <p:nvPr/>
         </p:nvSpPr>
         <p:spPr>
           <a:xfrm>
-            <a:off x="6428232" y="1581912"/>
-            <a:ext cx="457200" cy="457200"/>
+            <a:off x="6484467" y="2377440"/>
+            <a:ext cx="548640" cy="548640"/>
           </a:xfrm>
           <a:prstGeom prst="ellipse">
             <a:avLst/>
           </a:prstGeom>
           <a:solidFill>
-            <a:srgbClr val="B23A2A"/>
+            <a:srgbClr val="2E7D6B"/>
           </a:solidFill>
           <a:ln>
             <a:noFill/>
@@ -3869,14 +4027,14 @@
       </p:sp>
       <p:sp>
         <p:nvSpPr>
-          <p:cNvPr id="12" name="TextBox 11"/>
+          <p:cNvPr id="13" name="TextBox 12"/>
           <p:cNvSpPr txBox="1"/>
           <p:nvPr/>
         </p:nvSpPr>
         <p:spPr>
           <a:xfrm>
-            <a:off x="6428232" y="1636776"/>
-            <a:ext cx="457200" cy="384048"/>
+            <a:off x="6484467" y="2441448"/>
+            <a:ext cx="548640" cy="411480"/>
           </a:xfrm>
           <a:prstGeom prst="rect">
             <a:avLst/>
@@ -3891,7 +4049,7 @@
           <a:p>
             <a:pPr algn="ctr"/>
             <a:r>
-              <a:rPr sz="1600" b="1">
+              <a:rPr sz="2000" b="1">
                 <a:solidFill>
                   <a:srgbClr val="FFFFFF"/>
                 </a:solidFill>
@@ -3906,14 +4064,14 @@
       </p:sp>
       <p:sp>
         <p:nvSpPr>
-          <p:cNvPr id="13" name="TextBox 12"/>
+          <p:cNvPr id="14" name="TextBox 13"/>
           <p:cNvSpPr txBox="1"/>
           <p:nvPr/>
         </p:nvSpPr>
         <p:spPr>
           <a:xfrm>
-            <a:off x="6995160" y="1527048"/>
-            <a:ext cx="4434840" cy="457200"/>
+            <a:off x="7170267" y="2404872"/>
+            <a:ext cx="4198467" cy="548640"/>
           </a:xfrm>
           <a:prstGeom prst="rect">
             <a:avLst/>
@@ -3926,35 +4084,31 @@
           </a:bodyPr>
           <a:lstStyle/>
           <a:p>
-            <a:pPr algn="l">
-              <a:lnSpc>
-                <a:spcPct val="110000"/>
-              </a:lnSpc>
-            </a:pPr>
-            <a:r>
-              <a:rPr sz="1600" b="1">
-                <a:solidFill>
-                  <a:srgbClr val="1C2A33"/>
+            <a:pPr algn="l"/>
+            <a:r>
+              <a:rPr sz="1700" b="1">
+                <a:solidFill>
+                  <a:srgbClr val="2E7D6B"/>
                 </a:solidFill>
                 <a:latin typeface="微软雅黑"/>
                 <a:ea typeface="微软雅黑"/>
                 <a:cs typeface="微软雅黑"/>
               </a:rPr>
-              <a:t>目标</a:t>
-            </a:r>
-          </a:p>
-        </p:txBody>
-      </p:sp>
-      <p:sp>
-        <p:nvSpPr>
-          <p:cNvPr id="14" name="TextBox 13"/>
+              <a:t>科学思维</a:t>
+            </a:r>
+          </a:p>
+        </p:txBody>
+      </p:sp>
+      <p:sp>
+        <p:nvSpPr>
+          <p:cNvPr id="15" name="TextBox 14"/>
           <p:cNvSpPr txBox="1"/>
           <p:nvPr/>
         </p:nvSpPr>
         <p:spPr>
           <a:xfrm>
-            <a:off x="6995160" y="1965960"/>
-            <a:ext cx="4434840" cy="1417320"/>
+            <a:off x="6530187" y="3108960"/>
+            <a:ext cx="4747107" cy="868680"/>
           </a:xfrm>
           <a:prstGeom prst="rect">
             <a:avLst/>
@@ -3969,11 +4123,11 @@
           <a:p>
             <a:pPr algn="l">
               <a:lnSpc>
-                <a:spcPct val="128000"/>
+                <a:spcPct val="150000"/>
               </a:lnSpc>
             </a:pPr>
             <a:r>
-              <a:rPr sz="1400" b="0">
+              <a:rPr sz="1350" b="0">
                 <a:solidFill>
                   <a:srgbClr val="1C2A33"/>
                 </a:solidFill>
@@ -3981,21 +4135,21 @@
                 <a:ea typeface="楷体"/>
                 <a:cs typeface="楷体"/>
               </a:rPr>
-              <a:t>科学思维：用模型建构食物链/食物网，分析营养级关系。</a:t>
-            </a:r>
-          </a:p>
-        </p:txBody>
-      </p:sp>
-      <p:sp>
-        <p:nvSpPr>
-          <p:cNvPr id="15" name="Rounded Rectangle 14"/>
+              <a:t>用模型建构食物链/食物网，分析营养级关系。</a:t>
+            </a:r>
+          </a:p>
+        </p:txBody>
+      </p:sp>
+      <p:sp>
+        <p:nvSpPr>
+          <p:cNvPr id="16" name="Rounded Rectangle 15"/>
           <p:cNvSpPr/>
           <p:nvPr/>
         </p:nvSpPr>
         <p:spPr>
           <a:xfrm>
-            <a:off x="640080" y="3703320"/>
-            <a:ext cx="5349240" cy="2057400"/>
+            <a:off x="640080" y="4434840"/>
+            <a:ext cx="5295747" cy="1965960"/>
           </a:xfrm>
           <a:prstGeom prst="roundRect">
             <a:avLst/>
@@ -4003,9 +4157,9 @@
           <a:solidFill>
             <a:srgbClr val="FFFFFF"/>
           </a:solidFill>
-          <a:ln w="22860">
+          <a:ln w="20320">
             <a:solidFill>
-              <a:srgbClr val="B23A2A"/>
+              <a:srgbClr val="C8A86B"/>
             </a:solidFill>
           </a:ln>
           <a:effectLst/>
@@ -4034,20 +4188,20 @@
       </p:sp>
       <p:sp>
         <p:nvSpPr>
-          <p:cNvPr id="16" name="Oval 15"/>
+          <p:cNvPr id="17" name="Oval 16"/>
           <p:cNvSpPr/>
           <p:nvPr/>
         </p:nvSpPr>
         <p:spPr>
           <a:xfrm>
-            <a:off x="804672" y="3867912"/>
-            <a:ext cx="457200" cy="457200"/>
+            <a:off x="868680" y="4663440"/>
+            <a:ext cx="548640" cy="548640"/>
           </a:xfrm>
           <a:prstGeom prst="ellipse">
             <a:avLst/>
           </a:prstGeom>
           <a:solidFill>
-            <a:srgbClr val="B23A2A"/>
+            <a:srgbClr val="C8A86B"/>
           </a:solidFill>
           <a:ln>
             <a:noFill/>
@@ -4078,14 +4232,14 @@
       </p:sp>
       <p:sp>
         <p:nvSpPr>
-          <p:cNvPr id="17" name="TextBox 16"/>
+          <p:cNvPr id="18" name="TextBox 17"/>
           <p:cNvSpPr txBox="1"/>
           <p:nvPr/>
         </p:nvSpPr>
         <p:spPr>
           <a:xfrm>
-            <a:off x="804672" y="3922776"/>
-            <a:ext cx="457200" cy="384048"/>
+            <a:off x="868680" y="4727448"/>
+            <a:ext cx="548640" cy="411480"/>
           </a:xfrm>
           <a:prstGeom prst="rect">
             <a:avLst/>
@@ -4100,7 +4254,7 @@
           <a:p>
             <a:pPr algn="ctr"/>
             <a:r>
-              <a:rPr sz="1600" b="1">
+              <a:rPr sz="2000" b="1">
                 <a:solidFill>
                   <a:srgbClr val="FFFFFF"/>
                 </a:solidFill>
@@ -4115,14 +4269,14 @@
       </p:sp>
       <p:sp>
         <p:nvSpPr>
-          <p:cNvPr id="18" name="TextBox 17"/>
+          <p:cNvPr id="19" name="TextBox 18"/>
           <p:cNvSpPr txBox="1"/>
           <p:nvPr/>
         </p:nvSpPr>
         <p:spPr>
           <a:xfrm>
-            <a:off x="1371600" y="3813048"/>
-            <a:ext cx="4434840" cy="457200"/>
+            <a:off x="1554480" y="4690872"/>
+            <a:ext cx="4198467" cy="548640"/>
           </a:xfrm>
           <a:prstGeom prst="rect">
             <a:avLst/>
@@ -4135,35 +4289,31 @@
           </a:bodyPr>
           <a:lstStyle/>
           <a:p>
-            <a:pPr algn="l">
-              <a:lnSpc>
-                <a:spcPct val="110000"/>
-              </a:lnSpc>
-            </a:pPr>
-            <a:r>
-              <a:rPr sz="1600" b="1">
-                <a:solidFill>
-                  <a:srgbClr val="1C2A33"/>
+            <a:pPr algn="l"/>
+            <a:r>
+              <a:rPr sz="1700" b="1">
+                <a:solidFill>
+                  <a:srgbClr val="C8A86B"/>
                 </a:solidFill>
                 <a:latin typeface="微软雅黑"/>
                 <a:ea typeface="微软雅黑"/>
                 <a:cs typeface="微软雅黑"/>
               </a:rPr>
-              <a:t>目标</a:t>
-            </a:r>
-          </a:p>
-        </p:txBody>
-      </p:sp>
-      <p:sp>
-        <p:nvSpPr>
-          <p:cNvPr id="19" name="TextBox 18"/>
+              <a:t>科学探究</a:t>
+            </a:r>
+          </a:p>
+        </p:txBody>
+      </p:sp>
+      <p:sp>
+        <p:nvSpPr>
+          <p:cNvPr id="20" name="TextBox 19"/>
           <p:cNvSpPr txBox="1"/>
           <p:nvPr/>
         </p:nvSpPr>
         <p:spPr>
           <a:xfrm>
-            <a:off x="1371600" y="4251960"/>
-            <a:ext cx="4434840" cy="1417320"/>
+            <a:off x="914400" y="5394960"/>
+            <a:ext cx="4747107" cy="868680"/>
           </a:xfrm>
           <a:prstGeom prst="rect">
             <a:avLst/>
@@ -4178,11 +4328,11 @@
           <a:p>
             <a:pPr algn="l">
               <a:lnSpc>
-                <a:spcPct val="128000"/>
+                <a:spcPct val="150000"/>
               </a:lnSpc>
             </a:pPr>
             <a:r>
-              <a:rPr sz="1400" b="0">
+              <a:rPr sz="1350" b="0">
                 <a:solidFill>
                   <a:srgbClr val="1C2A33"/>
                 </a:solidFill>
@@ -4190,21 +4340,21 @@
                 <a:ea typeface="楷体"/>
                 <a:cs typeface="楷体"/>
               </a:rPr>
-              <a:t>科学探究：调查某一生态系统的成分与营养结构。</a:t>
-            </a:r>
-          </a:p>
-        </p:txBody>
-      </p:sp>
-      <p:sp>
-        <p:nvSpPr>
-          <p:cNvPr id="20" name="Rounded Rectangle 19"/>
+              <a:t>调查某一生态系统的成分与营养结构。</a:t>
+            </a:r>
+          </a:p>
+        </p:txBody>
+      </p:sp>
+      <p:sp>
+        <p:nvSpPr>
+          <p:cNvPr id="21" name="Rounded Rectangle 20"/>
           <p:cNvSpPr/>
           <p:nvPr/>
         </p:nvSpPr>
         <p:spPr>
           <a:xfrm>
-            <a:off x="6263640" y="3703320"/>
-            <a:ext cx="5349240" cy="2057400"/>
+            <a:off x="6255867" y="4434840"/>
+            <a:ext cx="5295747" cy="1965960"/>
           </a:xfrm>
           <a:prstGeom prst="roundRect">
             <a:avLst/>
@@ -4212,9 +4362,9 @@
           <a:solidFill>
             <a:srgbClr val="FFFFFF"/>
           </a:solidFill>
-          <a:ln w="22860">
+          <a:ln w="20320">
             <a:solidFill>
-              <a:srgbClr val="B23A2A"/>
+              <a:srgbClr val="6B6258"/>
             </a:solidFill>
           </a:ln>
           <a:effectLst/>
@@ -4243,20 +4393,20 @@
       </p:sp>
       <p:sp>
         <p:nvSpPr>
-          <p:cNvPr id="21" name="Oval 20"/>
+          <p:cNvPr id="22" name="Oval 21"/>
           <p:cNvSpPr/>
           <p:nvPr/>
         </p:nvSpPr>
         <p:spPr>
           <a:xfrm>
-            <a:off x="6428232" y="3867912"/>
-            <a:ext cx="457200" cy="457200"/>
+            <a:off x="6484467" y="4663440"/>
+            <a:ext cx="548640" cy="548640"/>
           </a:xfrm>
           <a:prstGeom prst="ellipse">
             <a:avLst/>
           </a:prstGeom>
           <a:solidFill>
-            <a:srgbClr val="B23A2A"/>
+            <a:srgbClr val="6B6258"/>
           </a:solidFill>
           <a:ln>
             <a:noFill/>
@@ -4287,14 +4437,14 @@
       </p:sp>
       <p:sp>
         <p:nvSpPr>
-          <p:cNvPr id="22" name="TextBox 21"/>
+          <p:cNvPr id="23" name="TextBox 22"/>
           <p:cNvSpPr txBox="1"/>
           <p:nvPr/>
         </p:nvSpPr>
         <p:spPr>
           <a:xfrm>
-            <a:off x="6428232" y="3922776"/>
-            <a:ext cx="457200" cy="384048"/>
+            <a:off x="6484467" y="4727448"/>
+            <a:ext cx="548640" cy="411480"/>
           </a:xfrm>
           <a:prstGeom prst="rect">
             <a:avLst/>
@@ -4309,7 +4459,7 @@
           <a:p>
             <a:pPr algn="ctr"/>
             <a:r>
-              <a:rPr sz="1600" b="1">
+              <a:rPr sz="2000" b="1">
                 <a:solidFill>
                   <a:srgbClr val="FFFFFF"/>
                 </a:solidFill>
@@ -4324,14 +4474,14 @@
       </p:sp>
       <p:sp>
         <p:nvSpPr>
-          <p:cNvPr id="23" name="TextBox 22"/>
+          <p:cNvPr id="24" name="TextBox 23"/>
           <p:cNvSpPr txBox="1"/>
           <p:nvPr/>
         </p:nvSpPr>
         <p:spPr>
           <a:xfrm>
-            <a:off x="6995160" y="3813048"/>
-            <a:ext cx="4434840" cy="457200"/>
+            <a:off x="7170267" y="4690872"/>
+            <a:ext cx="4198467" cy="548640"/>
           </a:xfrm>
           <a:prstGeom prst="rect">
             <a:avLst/>
@@ -4344,35 +4494,31 @@
           </a:bodyPr>
           <a:lstStyle/>
           <a:p>
-            <a:pPr algn="l">
-              <a:lnSpc>
-                <a:spcPct val="110000"/>
-              </a:lnSpc>
-            </a:pPr>
-            <a:r>
-              <a:rPr sz="1600" b="1">
-                <a:solidFill>
-                  <a:srgbClr val="1C2A33"/>
+            <a:pPr algn="l"/>
+            <a:r>
+              <a:rPr sz="1700" b="1">
+                <a:solidFill>
+                  <a:srgbClr val="6B6258"/>
                 </a:solidFill>
                 <a:latin typeface="微软雅黑"/>
                 <a:ea typeface="微软雅黑"/>
                 <a:cs typeface="微软雅黑"/>
               </a:rPr>
-              <a:t>目标</a:t>
-            </a:r>
-          </a:p>
-        </p:txBody>
-      </p:sp>
-      <p:sp>
-        <p:nvSpPr>
-          <p:cNvPr id="24" name="TextBox 23"/>
+              <a:t>社会责任</a:t>
+            </a:r>
+          </a:p>
+        </p:txBody>
+      </p:sp>
+      <p:sp>
+        <p:nvSpPr>
+          <p:cNvPr id="25" name="TextBox 24"/>
           <p:cNvSpPr txBox="1"/>
           <p:nvPr/>
         </p:nvSpPr>
         <p:spPr>
           <a:xfrm>
-            <a:off x="6995160" y="4251960"/>
-            <a:ext cx="4434840" cy="1417320"/>
+            <a:off x="6530187" y="5394960"/>
+            <a:ext cx="4747107" cy="868680"/>
           </a:xfrm>
           <a:prstGeom prst="rect">
             <a:avLst/>
@@ -4387,11 +4533,11 @@
           <a:p>
             <a:pPr algn="l">
               <a:lnSpc>
-                <a:spcPct val="128000"/>
+                <a:spcPct val="150000"/>
               </a:lnSpc>
             </a:pPr>
             <a:r>
-              <a:rPr sz="1400" b="0">
+              <a:rPr sz="1350" b="0">
                 <a:solidFill>
                   <a:srgbClr val="1C2A33"/>
                 </a:solidFill>
@@ -4399,14 +4545,14 @@
                 <a:ea typeface="楷体"/>
                 <a:cs typeface="楷体"/>
               </a:rPr>
-              <a:t>社会责任：认识保护生产者与分解者的重要性。</a:t>
-            </a:r>
-          </a:p>
-        </p:txBody>
-      </p:sp>
-      <p:sp>
-        <p:nvSpPr>
-          <p:cNvPr id="25" name="TextBox 24"/>
+              <a:t>认识保护生产者与分解者的重要性。</a:t>
+            </a:r>
+          </a:p>
+        </p:txBody>
+      </p:sp>
+      <p:sp>
+        <p:nvSpPr>
+          <p:cNvPr id="26" name="TextBox 25"/>
           <p:cNvSpPr txBox="1"/>
           <p:nvPr/>
         </p:nvSpPr>
@@ -4539,7 +4685,7 @@
                 <a:ea typeface="微软雅黑"/>
                 <a:cs typeface="微软雅黑"/>
               </a:rPr>
-              <a:t>课文背景</a:t>
+              <a:t>背景与权威调研</a:t>
             </a:r>
           </a:p>
         </p:txBody>
@@ -4596,8 +4742,8 @@
         </p:nvSpPr>
         <p:spPr>
           <a:xfrm>
-            <a:off x="640080" y="1508760"/>
-            <a:ext cx="6766560" cy="4572000"/>
+            <a:off x="640080" y="1298448"/>
+            <a:ext cx="10789920" cy="640080"/>
           </a:xfrm>
           <a:prstGeom prst="rect">
             <a:avLst/>
@@ -4610,16 +4756,90 @@
           </a:bodyPr>
           <a:lstStyle/>
           <a:p>
+            <a:pPr algn="l"/>
+            <a:r>
+              <a:rPr sz="3000" b="1">
+                <a:solidFill>
+                  <a:srgbClr val="1C2A33"/>
+                </a:solidFill>
+                <a:latin typeface="楷体"/>
+                <a:ea typeface="楷体"/>
+                <a:cs typeface="楷体"/>
+              </a:rPr>
+              <a:t>教材定位 · 权威来源</a:t>
+            </a:r>
+          </a:p>
+        </p:txBody>
+      </p:sp>
+      <p:sp>
+        <p:nvSpPr>
+          <p:cNvPr id="6" name="TextBox 5"/>
+          <p:cNvSpPr txBox="1"/>
+          <p:nvPr/>
+        </p:nvSpPr>
+        <p:spPr>
+          <a:xfrm>
+            <a:off x="640080" y="2011680"/>
+            <a:ext cx="5227167" cy="457200"/>
+          </a:xfrm>
+          <a:prstGeom prst="rect">
+            <a:avLst/>
+          </a:prstGeom>
+          <a:noFill/>
+        </p:spPr>
+        <p:txBody>
+          <a:bodyPr wrap="square" anchor="t" lIns="0" rIns="0" tIns="0" bIns="0">
+            <a:spAutoFit/>
+          </a:bodyPr>
+          <a:lstStyle/>
+          <a:p>
+            <a:pPr algn="l"/>
+            <a:r>
+              <a:rPr sz="1800" b="1">
+                <a:solidFill>
+                  <a:srgbClr val="2E7D6B"/>
+                </a:solidFill>
+                <a:latin typeface="楷体"/>
+                <a:ea typeface="楷体"/>
+                <a:cs typeface="楷体"/>
+              </a:rPr>
+              <a:t>教材定位</a:t>
+            </a:r>
+          </a:p>
+        </p:txBody>
+      </p:sp>
+      <p:sp>
+        <p:nvSpPr>
+          <p:cNvPr id="7" name="TextBox 6"/>
+          <p:cNvSpPr txBox="1"/>
+          <p:nvPr/>
+        </p:nvSpPr>
+        <p:spPr>
+          <a:xfrm>
+            <a:off x="640080" y="2514599"/>
+            <a:ext cx="5227167" cy="3931920"/>
+          </a:xfrm>
+          <a:prstGeom prst="rect">
+            <a:avLst/>
+          </a:prstGeom>
+          <a:noFill/>
+        </p:spPr>
+        <p:txBody>
+          <a:bodyPr wrap="square" anchor="t" lIns="0" rIns="0" tIns="0" bIns="0">
+            <a:spAutoFit/>
+          </a:bodyPr>
+          <a:lstStyle/>
+          <a:p>
             <a:pPr algn="l">
               <a:lnSpc>
-                <a:spcPct val="150000"/>
+                <a:spcPct val="155000"/>
               </a:lnSpc>
               <a:spcAft>
                 <a:spcPts val="600"/>
               </a:spcAft>
             </a:pPr>
             <a:r>
-              <a:rPr sz="1600" b="0">
+              <a:rPr sz="1450" b="0">
                 <a:solidFill>
                   <a:srgbClr val="1C2A33"/>
                 </a:solidFill>
@@ -4632,41 +4852,16 @@
           </a:p>
         </p:txBody>
       </p:sp>
-      <p:pic>
-        <p:nvPicPr>
-          <p:cNvPr id="6" name="Picture 5" descr="ricefield.jpg"/>
-          <p:cNvPicPr>
-            <a:picLocks noChangeAspect="1"/>
-          </p:cNvPicPr>
-          <p:nvPr/>
-        </p:nvPicPr>
-        <p:blipFill>
-          <a:blip r:embed="rId2"/>
-          <a:srcRect l="23066" r="23066"/>
-          <a:stretch>
-            <a:fillRect/>
-          </a:stretch>
-        </p:blipFill>
-        <p:spPr>
-          <a:xfrm>
-            <a:off x="8046720" y="1508760"/>
-            <a:ext cx="4114800" cy="3108960"/>
-          </a:xfrm>
-          <a:prstGeom prst="rect">
-            <a:avLst/>
-          </a:prstGeom>
-        </p:spPr>
-      </p:pic>
-      <p:sp>
-        <p:nvSpPr>
-          <p:cNvPr id="7" name="TextBox 6"/>
+      <p:sp>
+        <p:nvSpPr>
+          <p:cNvPr id="8" name="TextBox 7"/>
           <p:cNvSpPr txBox="1"/>
           <p:nvPr/>
         </p:nvSpPr>
         <p:spPr>
           <a:xfrm>
-            <a:off x="8046720" y="4663440"/>
-            <a:ext cx="4114800" cy="365760"/>
+            <a:off x="640080" y="5806440"/>
+            <a:ext cx="5227167" cy="457200"/>
           </a:xfrm>
           <a:prstGeom prst="rect">
             <a:avLst/>
@@ -4679,24 +4874,208 @@
           </a:bodyPr>
           <a:lstStyle/>
           <a:p>
+            <a:pPr algn="l">
+              <a:lnSpc>
+                <a:spcPct val="140000"/>
+              </a:lnSpc>
+            </a:pPr>
+            <a:r>
+              <a:rPr sz="1250" b="0">
+                <a:solidFill>
+                  <a:srgbClr val="6B6258"/>
+                </a:solidFill>
+                <a:latin typeface="楷体"/>
+                <a:ea typeface="楷体"/>
+                <a:cs typeface="楷体"/>
+              </a:rPr>
+              <a:t>一句话：生态系统的结构，是本单元要落实的核心知识。</a:t>
+            </a:r>
+          </a:p>
+        </p:txBody>
+      </p:sp>
+      <p:sp>
+        <p:nvSpPr>
+          <p:cNvPr id="9" name="Rounded Rectangle 8"/>
+          <p:cNvSpPr/>
+          <p:nvPr/>
+        </p:nvSpPr>
+        <p:spPr>
+          <a:xfrm>
+            <a:off x="6324447" y="2011680"/>
+            <a:ext cx="5227167" cy="4297680"/>
+          </a:xfrm>
+          <a:prstGeom prst="roundRect">
+            <a:avLst/>
+          </a:prstGeom>
+          <a:solidFill>
+            <a:srgbClr val="1C2A33"/>
+          </a:solidFill>
+          <a:effectLst/>
+        </p:spPr>
+        <p:style>
+          <a:lnRef idx="1">
+            <a:schemeClr val="accent1"/>
+          </a:lnRef>
+          <a:fillRef idx="3">
+            <a:schemeClr val="accent1"/>
+          </a:fillRef>
+          <a:effectRef idx="2">
+            <a:schemeClr val="accent1"/>
+          </a:effectRef>
+          <a:fontRef idx="minor">
+            <a:schemeClr val="lt1"/>
+          </a:fontRef>
+        </p:style>
+        <p:txBody>
+          <a:bodyPr rtlCol="0" anchor="ctr"/>
+          <a:lstStyle/>
+          <a:p>
             <a:pPr algn="ctr"/>
-            <a:r>
-              <a:rPr sz="1100" b="0">
-                <a:solidFill>
-                  <a:srgbClr val="6B6258"/>
+          </a:p>
+        </p:txBody>
+      </p:sp>
+      <p:sp>
+        <p:nvSpPr>
+          <p:cNvPr id="10" name="TextBox 9"/>
+          <p:cNvSpPr txBox="1"/>
+          <p:nvPr/>
+        </p:nvSpPr>
+        <p:spPr>
+          <a:xfrm>
+            <a:off x="6598767" y="2148840"/>
+            <a:ext cx="4678527" cy="457200"/>
+          </a:xfrm>
+          <a:prstGeom prst="rect">
+            <a:avLst/>
+          </a:prstGeom>
+          <a:noFill/>
+        </p:spPr>
+        <p:txBody>
+          <a:bodyPr wrap="square" anchor="t" lIns="0" rIns="0" tIns="0" bIns="0">
+            <a:spAutoFit/>
+          </a:bodyPr>
+          <a:lstStyle/>
+          <a:p>
+            <a:pPr algn="l"/>
+            <a:r>
+              <a:rPr sz="1500" b="1">
+                <a:solidFill>
+                  <a:srgbClr val="C8A86B"/>
                 </a:solidFill>
                 <a:latin typeface="微软雅黑"/>
                 <a:ea typeface="微软雅黑"/>
                 <a:cs typeface="微软雅黑"/>
               </a:rPr>
-              <a:t>资料图（自由授权，复用 ricefield.jpg）</a:t>
-            </a:r>
-          </a:p>
-        </p:txBody>
-      </p:sp>
-      <p:sp>
-        <p:nvSpPr>
-          <p:cNvPr id="8" name="TextBox 7"/>
+              <a:t>权威来源（已联网核实）</a:t>
+            </a:r>
+          </a:p>
+        </p:txBody>
+      </p:sp>
+      <p:sp>
+        <p:nvSpPr>
+          <p:cNvPr id="11" name="TextBox 10"/>
+          <p:cNvSpPr txBox="1"/>
+          <p:nvPr/>
+        </p:nvSpPr>
+        <p:spPr>
+          <a:xfrm>
+            <a:off x="6598767" y="2651760"/>
+            <a:ext cx="4678527" cy="3474720"/>
+          </a:xfrm>
+          <a:prstGeom prst="rect">
+            <a:avLst/>
+          </a:prstGeom>
+          <a:noFill/>
+        </p:spPr>
+        <p:txBody>
+          <a:bodyPr wrap="square" anchor="t" lIns="0" rIns="0" tIns="0" bIns="0">
+            <a:spAutoFit/>
+          </a:bodyPr>
+          <a:lstStyle/>
+          <a:p>
+            <a:pPr algn="l">
+              <a:lnSpc>
+                <a:spcPct val="145000"/>
+              </a:lnSpc>
+              <a:spcAft>
+                <a:spcPts val="800"/>
+              </a:spcAft>
+            </a:pPr>
+            <a:r>
+              <a:rPr sz="1250" b="0">
+                <a:solidFill>
+                  <a:srgbClr val="FFFFFF"/>
+                </a:solidFill>
+                <a:latin typeface="楷体"/>
+                <a:ea typeface="楷体"/>
+                <a:cs typeface="楷体"/>
+              </a:rPr>
+              <a:t>· 生态系统 = 生物群落 + 无机环境；组成含非生物物质能量、生产者、消费者、分解者（Britannica ecosystem / Trophic-levels）。</a:t>
+            </a:r>
+          </a:p>
+          <a:p>
+            <a:pPr algn="l">
+              <a:lnSpc>
+                <a:spcPct val="145000"/>
+              </a:lnSpc>
+              <a:spcAft>
+                <a:spcPts val="800"/>
+              </a:spcAft>
+            </a:pPr>
+            <a:r>
+              <a:rPr sz="1250" b="0">
+                <a:solidFill>
+                  <a:srgbClr val="FFFFFF"/>
+                </a:solidFill>
+                <a:latin typeface="楷体"/>
+                <a:ea typeface="楷体"/>
+                <a:cs typeface="楷体"/>
+              </a:rPr>
+              <a:t>· 营养级自生产者起算；食物链仅含生产者与消费者，分解者在链外（Britannica food-web）。</a:t>
+            </a:r>
+          </a:p>
+        </p:txBody>
+      </p:sp>
+      <p:sp>
+        <p:nvSpPr>
+          <p:cNvPr id="12" name="TextBox 11"/>
+          <p:cNvSpPr txBox="1"/>
+          <p:nvPr/>
+        </p:nvSpPr>
+        <p:spPr>
+          <a:xfrm>
+            <a:off x="6324447" y="5806440"/>
+            <a:ext cx="5227167" cy="365760"/>
+          </a:xfrm>
+          <a:prstGeom prst="rect">
+            <a:avLst/>
+          </a:prstGeom>
+          <a:noFill/>
+        </p:spPr>
+        <p:txBody>
+          <a:bodyPr wrap="square" anchor="t" lIns="0" rIns="0" tIns="0" bIns="0">
+            <a:spAutoFit/>
+          </a:bodyPr>
+          <a:lstStyle/>
+          <a:p>
+            <a:pPr algn="ctr"/>
+            <a:r>
+              <a:rPr sz="1100" b="0">
+                <a:solidFill>
+                  <a:srgbClr val="6B6258"/>
+                </a:solidFill>
+                <a:latin typeface="微软雅黑"/>
+                <a:ea typeface="微软雅黑"/>
+                <a:cs typeface="微软雅黑"/>
+              </a:rPr>
+              <a:t>本课件未使用无关配图，采用学科色块兜底（生物·湘碧）。</a:t>
+            </a:r>
+          </a:p>
+        </p:txBody>
+      </p:sp>
+      <p:sp>
+        <p:nvSpPr>
+          <p:cNvPr id="13" name="TextBox 12"/>
           <p:cNvSpPr txBox="1"/>
           <p:nvPr/>
         </p:nvSpPr>
@@ -4829,7 +5208,7 @@
                 <a:ea typeface="微软雅黑"/>
                 <a:cs typeface="微软雅黑"/>
               </a:rPr>
-              <a:t>学习重点</a:t>
+              <a:t>重点</a:t>
             </a:r>
           </a:p>
         </p:txBody>
@@ -4880,14 +5259,51 @@
       </p:sp>
       <p:sp>
         <p:nvSpPr>
-          <p:cNvPr id="5" name="Rounded Rectangle 4"/>
+          <p:cNvPr id="5" name="TextBox 4"/>
+          <p:cNvSpPr txBox="1"/>
+          <p:nvPr/>
+        </p:nvSpPr>
+        <p:spPr>
+          <a:xfrm>
+            <a:off x="640080" y="1298448"/>
+            <a:ext cx="10789920" cy="640080"/>
+          </a:xfrm>
+          <a:prstGeom prst="rect">
+            <a:avLst/>
+          </a:prstGeom>
+          <a:noFill/>
+        </p:spPr>
+        <p:txBody>
+          <a:bodyPr wrap="square" anchor="t" lIns="0" rIns="0" tIns="0" bIns="0">
+            <a:spAutoFit/>
+          </a:bodyPr>
+          <a:lstStyle/>
+          <a:p>
+            <a:pPr algn="l"/>
+            <a:r>
+              <a:rPr sz="3000" b="1">
+                <a:solidFill>
+                  <a:srgbClr val="1C2A33"/>
+                </a:solidFill>
+                <a:latin typeface="楷体"/>
+                <a:ea typeface="楷体"/>
+                <a:cs typeface="楷体"/>
+              </a:rPr>
+              <a:t>本课重点</a:t>
+            </a:r>
+          </a:p>
+        </p:txBody>
+      </p:sp>
+      <p:sp>
+        <p:nvSpPr>
+          <p:cNvPr id="6" name="Rounded Rectangle 5"/>
           <p:cNvSpPr/>
           <p:nvPr/>
         </p:nvSpPr>
         <p:spPr>
           <a:xfrm>
-            <a:off x="640080" y="1371600"/>
-            <a:ext cx="10911535" cy="1170432"/>
+            <a:off x="640080" y="2148840"/>
+            <a:ext cx="5295747" cy="1965960"/>
           </a:xfrm>
           <a:prstGeom prst="roundRect">
             <a:avLst/>
@@ -4895,7 +5311,343 @@
           <a:solidFill>
             <a:srgbClr val="FFFFFF"/>
           </a:solidFill>
-          <a:ln w="22860">
+          <a:ln w="20320">
+            <a:solidFill>
+              <a:srgbClr val="B23A2A"/>
+            </a:solidFill>
+          </a:ln>
+          <a:effectLst/>
+        </p:spPr>
+        <p:style>
+          <a:lnRef idx="1">
+            <a:schemeClr val="accent1"/>
+          </a:lnRef>
+          <a:fillRef idx="3">
+            <a:schemeClr val="accent1"/>
+          </a:fillRef>
+          <a:effectRef idx="2">
+            <a:schemeClr val="accent1"/>
+          </a:effectRef>
+          <a:fontRef idx="minor">
+            <a:schemeClr val="lt1"/>
+          </a:fontRef>
+        </p:style>
+        <p:txBody>
+          <a:bodyPr rtlCol="0" anchor="ctr"/>
+          <a:lstStyle/>
+          <a:p>
+            <a:pPr algn="ctr"/>
+          </a:p>
+        </p:txBody>
+      </p:sp>
+      <p:sp>
+        <p:nvSpPr>
+          <p:cNvPr id="7" name="Rectangle 6"/>
+          <p:cNvSpPr/>
+          <p:nvPr/>
+        </p:nvSpPr>
+        <p:spPr>
+          <a:xfrm>
+            <a:off x="640080" y="2148840"/>
+            <a:ext cx="5295747" cy="457200"/>
+          </a:xfrm>
+          <a:prstGeom prst="rect">
+            <a:avLst/>
+          </a:prstGeom>
+          <a:solidFill>
+            <a:srgbClr val="B23A2A"/>
+          </a:solidFill>
+          <a:ln>
+            <a:noFill/>
+          </a:ln>
+          <a:effectLst/>
+        </p:spPr>
+        <p:style>
+          <a:lnRef idx="1">
+            <a:schemeClr val="accent1"/>
+          </a:lnRef>
+          <a:fillRef idx="3">
+            <a:schemeClr val="accent1"/>
+          </a:fillRef>
+          <a:effectRef idx="2">
+            <a:schemeClr val="accent1"/>
+          </a:effectRef>
+          <a:fontRef idx="minor">
+            <a:schemeClr val="lt1"/>
+          </a:fontRef>
+        </p:style>
+        <p:txBody>
+          <a:bodyPr rtlCol="0" anchor="ctr"/>
+          <a:lstStyle/>
+          <a:p>
+            <a:pPr algn="ctr"/>
+          </a:p>
+        </p:txBody>
+      </p:sp>
+      <p:sp>
+        <p:nvSpPr>
+          <p:cNvPr id="8" name="TextBox 7"/>
+          <p:cNvSpPr txBox="1"/>
+          <p:nvPr/>
+        </p:nvSpPr>
+        <p:spPr>
+          <a:xfrm>
+            <a:off x="640080" y="2203704"/>
+            <a:ext cx="5295747" cy="365760"/>
+          </a:xfrm>
+          <a:prstGeom prst="rect">
+            <a:avLst/>
+          </a:prstGeom>
+          <a:noFill/>
+        </p:spPr>
+        <p:txBody>
+          <a:bodyPr wrap="square" anchor="t" lIns="0" rIns="0" tIns="0" bIns="0">
+            <a:spAutoFit/>
+          </a:bodyPr>
+          <a:lstStyle/>
+          <a:p>
+            <a:pPr algn="ctr"/>
+            <a:r>
+              <a:rPr sz="1400" b="1">
+                <a:solidFill>
+                  <a:srgbClr val="FFFFFF"/>
+                </a:solidFill>
+                <a:latin typeface="微软雅黑"/>
+                <a:ea typeface="微软雅黑"/>
+                <a:cs typeface="微软雅黑"/>
+              </a:rPr>
+              <a:t>重点 1</a:t>
+            </a:r>
+          </a:p>
+        </p:txBody>
+      </p:sp>
+      <p:sp>
+        <p:nvSpPr>
+          <p:cNvPr id="9" name="TextBox 8"/>
+          <p:cNvSpPr txBox="1"/>
+          <p:nvPr/>
+        </p:nvSpPr>
+        <p:spPr>
+          <a:xfrm>
+            <a:off x="914400" y="2743200"/>
+            <a:ext cx="4747107" cy="1234440"/>
+          </a:xfrm>
+          <a:prstGeom prst="rect">
+            <a:avLst/>
+          </a:prstGeom>
+          <a:noFill/>
+        </p:spPr>
+        <p:txBody>
+          <a:bodyPr wrap="square" anchor="t" lIns="0" rIns="0" tIns="0" bIns="0">
+            <a:spAutoFit/>
+          </a:bodyPr>
+          <a:lstStyle/>
+          <a:p>
+            <a:pPr algn="l">
+              <a:lnSpc>
+                <a:spcPct val="150000"/>
+              </a:lnSpc>
+            </a:pPr>
+            <a:r>
+              <a:rPr sz="1400" b="0">
+                <a:solidFill>
+                  <a:srgbClr val="1C2A33"/>
+                </a:solidFill>
+                <a:latin typeface="楷体"/>
+                <a:ea typeface="楷体"/>
+                <a:cs typeface="楷体"/>
+              </a:rPr>
+              <a:t>① 生态系统=生物群落+无机环境。</a:t>
+            </a:r>
+          </a:p>
+        </p:txBody>
+      </p:sp>
+      <p:sp>
+        <p:nvSpPr>
+          <p:cNvPr id="10" name="Rounded Rectangle 9"/>
+          <p:cNvSpPr/>
+          <p:nvPr/>
+        </p:nvSpPr>
+        <p:spPr>
+          <a:xfrm>
+            <a:off x="6255867" y="2148840"/>
+            <a:ext cx="5295747" cy="1965960"/>
+          </a:xfrm>
+          <a:prstGeom prst="roundRect">
+            <a:avLst/>
+          </a:prstGeom>
+          <a:solidFill>
+            <a:srgbClr val="FFFFFF"/>
+          </a:solidFill>
+          <a:ln w="20320">
+            <a:solidFill>
+              <a:srgbClr val="2E7D6B"/>
+            </a:solidFill>
+          </a:ln>
+          <a:effectLst/>
+        </p:spPr>
+        <p:style>
+          <a:lnRef idx="1">
+            <a:schemeClr val="accent1"/>
+          </a:lnRef>
+          <a:fillRef idx="3">
+            <a:schemeClr val="accent1"/>
+          </a:fillRef>
+          <a:effectRef idx="2">
+            <a:schemeClr val="accent1"/>
+          </a:effectRef>
+          <a:fontRef idx="minor">
+            <a:schemeClr val="lt1"/>
+          </a:fontRef>
+        </p:style>
+        <p:txBody>
+          <a:bodyPr rtlCol="0" anchor="ctr"/>
+          <a:lstStyle/>
+          <a:p>
+            <a:pPr algn="ctr"/>
+          </a:p>
+        </p:txBody>
+      </p:sp>
+      <p:sp>
+        <p:nvSpPr>
+          <p:cNvPr id="11" name="Rectangle 10"/>
+          <p:cNvSpPr/>
+          <p:nvPr/>
+        </p:nvSpPr>
+        <p:spPr>
+          <a:xfrm>
+            <a:off x="6255867" y="2148840"/>
+            <a:ext cx="5295747" cy="457200"/>
+          </a:xfrm>
+          <a:prstGeom prst="rect">
+            <a:avLst/>
+          </a:prstGeom>
+          <a:solidFill>
+            <a:srgbClr val="2E7D6B"/>
+          </a:solidFill>
+          <a:ln>
+            <a:noFill/>
+          </a:ln>
+          <a:effectLst/>
+        </p:spPr>
+        <p:style>
+          <a:lnRef idx="1">
+            <a:schemeClr val="accent1"/>
+          </a:lnRef>
+          <a:fillRef idx="3">
+            <a:schemeClr val="accent1"/>
+          </a:fillRef>
+          <a:effectRef idx="2">
+            <a:schemeClr val="accent1"/>
+          </a:effectRef>
+          <a:fontRef idx="minor">
+            <a:schemeClr val="lt1"/>
+          </a:fontRef>
+        </p:style>
+        <p:txBody>
+          <a:bodyPr rtlCol="0" anchor="ctr"/>
+          <a:lstStyle/>
+          <a:p>
+            <a:pPr algn="ctr"/>
+          </a:p>
+        </p:txBody>
+      </p:sp>
+      <p:sp>
+        <p:nvSpPr>
+          <p:cNvPr id="12" name="TextBox 11"/>
+          <p:cNvSpPr txBox="1"/>
+          <p:nvPr/>
+        </p:nvSpPr>
+        <p:spPr>
+          <a:xfrm>
+            <a:off x="6255867" y="2203704"/>
+            <a:ext cx="5295747" cy="365760"/>
+          </a:xfrm>
+          <a:prstGeom prst="rect">
+            <a:avLst/>
+          </a:prstGeom>
+          <a:noFill/>
+        </p:spPr>
+        <p:txBody>
+          <a:bodyPr wrap="square" anchor="t" lIns="0" rIns="0" tIns="0" bIns="0">
+            <a:spAutoFit/>
+          </a:bodyPr>
+          <a:lstStyle/>
+          <a:p>
+            <a:pPr algn="ctr"/>
+            <a:r>
+              <a:rPr sz="1400" b="1">
+                <a:solidFill>
+                  <a:srgbClr val="FFFFFF"/>
+                </a:solidFill>
+                <a:latin typeface="微软雅黑"/>
+                <a:ea typeface="微软雅黑"/>
+                <a:cs typeface="微软雅黑"/>
+              </a:rPr>
+              <a:t>重点 2</a:t>
+            </a:r>
+          </a:p>
+        </p:txBody>
+      </p:sp>
+      <p:sp>
+        <p:nvSpPr>
+          <p:cNvPr id="13" name="TextBox 12"/>
+          <p:cNvSpPr txBox="1"/>
+          <p:nvPr/>
+        </p:nvSpPr>
+        <p:spPr>
+          <a:xfrm>
+            <a:off x="6530187" y="2743200"/>
+            <a:ext cx="4747107" cy="1234440"/>
+          </a:xfrm>
+          <a:prstGeom prst="rect">
+            <a:avLst/>
+          </a:prstGeom>
+          <a:noFill/>
+        </p:spPr>
+        <p:txBody>
+          <a:bodyPr wrap="square" anchor="t" lIns="0" rIns="0" tIns="0" bIns="0">
+            <a:spAutoFit/>
+          </a:bodyPr>
+          <a:lstStyle/>
+          <a:p>
+            <a:pPr algn="l">
+              <a:lnSpc>
+                <a:spcPct val="150000"/>
+              </a:lnSpc>
+            </a:pPr>
+            <a:r>
+              <a:rPr sz="1400" b="0">
+                <a:solidFill>
+                  <a:srgbClr val="1C2A33"/>
+                </a:solidFill>
+                <a:latin typeface="楷体"/>
+                <a:ea typeface="楷体"/>
+                <a:cs typeface="楷体"/>
+              </a:rPr>
+              <a:t>② 四成分：非生物物质能量、生产者（自养，基石）、消费者（异养）、分解者（腐生，不可缺）。</a:t>
+            </a:r>
+          </a:p>
+        </p:txBody>
+      </p:sp>
+      <p:sp>
+        <p:nvSpPr>
+          <p:cNvPr id="14" name="Rounded Rectangle 13"/>
+          <p:cNvSpPr/>
+          <p:nvPr/>
+        </p:nvSpPr>
+        <p:spPr>
+          <a:xfrm>
+            <a:off x="640080" y="4434840"/>
+            <a:ext cx="5295747" cy="1965960"/>
+          </a:xfrm>
+          <a:prstGeom prst="roundRect">
+            <a:avLst/>
+          </a:prstGeom>
+          <a:solidFill>
+            <a:srgbClr val="FFFFFF"/>
+          </a:solidFill>
+          <a:ln w="20320">
             <a:solidFill>
               <a:srgbClr val="C8A86B"/>
             </a:solidFill>
@@ -4926,107 +5678,23 @@
       </p:sp>
       <p:sp>
         <p:nvSpPr>
-          <p:cNvPr id="6" name="TextBox 5"/>
-          <p:cNvSpPr txBox="1"/>
-          <p:nvPr/>
-        </p:nvSpPr>
-        <p:spPr>
-          <a:xfrm>
-            <a:off x="1371600" y="1481328"/>
-            <a:ext cx="9997135" cy="457200"/>
-          </a:xfrm>
-          <a:prstGeom prst="rect">
-            <a:avLst/>
-          </a:prstGeom>
-          <a:noFill/>
-        </p:spPr>
-        <p:txBody>
-          <a:bodyPr wrap="square" anchor="t" lIns="0" rIns="0" tIns="0" bIns="0">
-            <a:spAutoFit/>
-          </a:bodyPr>
-          <a:lstStyle/>
-          <a:p>
-            <a:pPr algn="l">
-              <a:lnSpc>
-                <a:spcPct val="110000"/>
-              </a:lnSpc>
-            </a:pPr>
-            <a:r>
-              <a:rPr sz="1600" b="1">
-                <a:solidFill>
-                  <a:srgbClr val="1C2A33"/>
-                </a:solidFill>
-                <a:latin typeface="微软雅黑"/>
-                <a:ea typeface="微软雅黑"/>
-                <a:cs typeface="微软雅黑"/>
-              </a:rPr>
-              <a:t/>
-            </a:r>
-          </a:p>
-        </p:txBody>
-      </p:sp>
-      <p:sp>
-        <p:nvSpPr>
-          <p:cNvPr id="7" name="TextBox 6"/>
-          <p:cNvSpPr txBox="1"/>
-          <p:nvPr/>
-        </p:nvSpPr>
-        <p:spPr>
-          <a:xfrm>
-            <a:off x="1371600" y="1920240"/>
-            <a:ext cx="9997135" cy="530352"/>
-          </a:xfrm>
-          <a:prstGeom prst="rect">
-            <a:avLst/>
-          </a:prstGeom>
-          <a:noFill/>
-        </p:spPr>
-        <p:txBody>
-          <a:bodyPr wrap="square" anchor="t" lIns="0" rIns="0" tIns="0" bIns="0">
-            <a:spAutoFit/>
-          </a:bodyPr>
-          <a:lstStyle/>
-          <a:p>
-            <a:pPr algn="l">
-              <a:lnSpc>
-                <a:spcPct val="128000"/>
-              </a:lnSpc>
-            </a:pPr>
-            <a:r>
-              <a:rPr sz="1300" b="0">
-                <a:solidFill>
-                  <a:srgbClr val="1C2A33"/>
-                </a:solidFill>
-                <a:latin typeface="楷体"/>
-                <a:ea typeface="楷体"/>
-                <a:cs typeface="楷体"/>
-              </a:rPr>
-              <a:t>① 生态系统=生物群落+无机环境。</a:t>
-            </a:r>
-          </a:p>
-        </p:txBody>
-      </p:sp>
-      <p:sp>
-        <p:nvSpPr>
-          <p:cNvPr id="8" name="Rounded Rectangle 7"/>
+          <p:cNvPr id="15" name="Rectangle 14"/>
           <p:cNvSpPr/>
           <p:nvPr/>
         </p:nvSpPr>
         <p:spPr>
           <a:xfrm>
-            <a:off x="640080" y="2651760"/>
-            <a:ext cx="10911535" cy="1170432"/>
-          </a:xfrm>
-          <a:prstGeom prst="roundRect">
+            <a:off x="640080" y="4434840"/>
+            <a:ext cx="5295747" cy="457200"/>
+          </a:xfrm>
+          <a:prstGeom prst="rect">
             <a:avLst/>
           </a:prstGeom>
           <a:solidFill>
-            <a:srgbClr val="FFFFFF"/>
+            <a:srgbClr val="C8A86B"/>
           </a:solidFill>
-          <a:ln w="22860">
-            <a:solidFill>
-              <a:srgbClr val="C8A86B"/>
-            </a:solidFill>
+          <a:ln>
+            <a:noFill/>
           </a:ln>
           <a:effectLst/>
         </p:spPr>
@@ -5054,14 +5722,14 @@
       </p:sp>
       <p:sp>
         <p:nvSpPr>
-          <p:cNvPr id="9" name="TextBox 8"/>
+          <p:cNvPr id="16" name="TextBox 15"/>
           <p:cNvSpPr txBox="1"/>
           <p:nvPr/>
         </p:nvSpPr>
         <p:spPr>
           <a:xfrm>
-            <a:off x="1371600" y="2761488"/>
-            <a:ext cx="9997135" cy="457200"/>
+            <a:off x="640080" y="4489704"/>
+            <a:ext cx="5295747" cy="365760"/>
           </a:xfrm>
           <a:prstGeom prst="rect">
             <a:avLst/>
@@ -5074,35 +5742,31 @@
           </a:bodyPr>
           <a:lstStyle/>
           <a:p>
-            <a:pPr algn="l">
-              <a:lnSpc>
-                <a:spcPct val="110000"/>
-              </a:lnSpc>
-            </a:pPr>
-            <a:r>
-              <a:rPr sz="1600" b="1">
-                <a:solidFill>
-                  <a:srgbClr val="1C2A33"/>
+            <a:pPr algn="ctr"/>
+            <a:r>
+              <a:rPr sz="1400" b="1">
+                <a:solidFill>
+                  <a:srgbClr val="FFFFFF"/>
                 </a:solidFill>
                 <a:latin typeface="微软雅黑"/>
                 <a:ea typeface="微软雅黑"/>
                 <a:cs typeface="微软雅黑"/>
               </a:rPr>
-              <a:t/>
-            </a:r>
-          </a:p>
-        </p:txBody>
-      </p:sp>
-      <p:sp>
-        <p:nvSpPr>
-          <p:cNvPr id="10" name="TextBox 9"/>
+              <a:t>重点 3</a:t>
+            </a:r>
+          </a:p>
+        </p:txBody>
+      </p:sp>
+      <p:sp>
+        <p:nvSpPr>
+          <p:cNvPr id="17" name="TextBox 16"/>
           <p:cNvSpPr txBox="1"/>
           <p:nvPr/>
         </p:nvSpPr>
         <p:spPr>
           <a:xfrm>
-            <a:off x="1371600" y="3200400"/>
-            <a:ext cx="9997135" cy="530352"/>
+            <a:off x="914400" y="5029200"/>
+            <a:ext cx="4747107" cy="1234440"/>
           </a:xfrm>
           <a:prstGeom prst="rect">
             <a:avLst/>
@@ -5117,11 +5781,11 @@
           <a:p>
             <a:pPr algn="l">
               <a:lnSpc>
-                <a:spcPct val="128000"/>
+                <a:spcPct val="150000"/>
               </a:lnSpc>
             </a:pPr>
             <a:r>
-              <a:rPr sz="1200" b="0">
+              <a:rPr sz="1400" b="0">
                 <a:solidFill>
                   <a:srgbClr val="1C2A33"/>
                 </a:solidFill>
@@ -5129,21 +5793,21 @@
                 <a:ea typeface="楷体"/>
                 <a:cs typeface="楷体"/>
               </a:rPr>
-              <a:t>② 四成分：非生物物质能量、生产者（自养，基石）、消费者（异养）、分解者（腐生，不可缺）。</a:t>
-            </a:r>
-          </a:p>
-        </p:txBody>
-      </p:sp>
-      <p:sp>
-        <p:nvSpPr>
-          <p:cNvPr id="11" name="Rounded Rectangle 10"/>
+              <a:t>③ 食物链：生产者→初级→次级消费者…只含生产者和消费者。</a:t>
+            </a:r>
+          </a:p>
+        </p:txBody>
+      </p:sp>
+      <p:sp>
+        <p:nvSpPr>
+          <p:cNvPr id="18" name="Rounded Rectangle 17"/>
           <p:cNvSpPr/>
           <p:nvPr/>
         </p:nvSpPr>
         <p:spPr>
           <a:xfrm>
-            <a:off x="640080" y="3931920"/>
-            <a:ext cx="10911535" cy="1170432"/>
+            <a:off x="6255867" y="4434840"/>
+            <a:ext cx="5295747" cy="1965960"/>
           </a:xfrm>
           <a:prstGeom prst="roundRect">
             <a:avLst/>
@@ -5151,9 +5815,9 @@
           <a:solidFill>
             <a:srgbClr val="FFFFFF"/>
           </a:solidFill>
-          <a:ln w="22860">
+          <a:ln w="20320">
             <a:solidFill>
-              <a:srgbClr val="C8A86B"/>
+              <a:srgbClr val="6B6258"/>
             </a:solidFill>
           </a:ln>
           <a:effectLst/>
@@ -5182,107 +5846,23 @@
       </p:sp>
       <p:sp>
         <p:nvSpPr>
-          <p:cNvPr id="12" name="TextBox 11"/>
-          <p:cNvSpPr txBox="1"/>
-          <p:nvPr/>
-        </p:nvSpPr>
-        <p:spPr>
-          <a:xfrm>
-            <a:off x="1371600" y="4041648"/>
-            <a:ext cx="9997135" cy="457200"/>
-          </a:xfrm>
-          <a:prstGeom prst="rect">
-            <a:avLst/>
-          </a:prstGeom>
-          <a:noFill/>
-        </p:spPr>
-        <p:txBody>
-          <a:bodyPr wrap="square" anchor="t" lIns="0" rIns="0" tIns="0" bIns="0">
-            <a:spAutoFit/>
-          </a:bodyPr>
-          <a:lstStyle/>
-          <a:p>
-            <a:pPr algn="l">
-              <a:lnSpc>
-                <a:spcPct val="110000"/>
-              </a:lnSpc>
-            </a:pPr>
-            <a:r>
-              <a:rPr sz="1600" b="1">
-                <a:solidFill>
-                  <a:srgbClr val="1C2A33"/>
-                </a:solidFill>
-                <a:latin typeface="微软雅黑"/>
-                <a:ea typeface="微软雅黑"/>
-                <a:cs typeface="微软雅黑"/>
-              </a:rPr>
-              <a:t/>
-            </a:r>
-          </a:p>
-        </p:txBody>
-      </p:sp>
-      <p:sp>
-        <p:nvSpPr>
-          <p:cNvPr id="13" name="TextBox 12"/>
-          <p:cNvSpPr txBox="1"/>
-          <p:nvPr/>
-        </p:nvSpPr>
-        <p:spPr>
-          <a:xfrm>
-            <a:off x="1371600" y="4480560"/>
-            <a:ext cx="9997135" cy="530352"/>
-          </a:xfrm>
-          <a:prstGeom prst="rect">
-            <a:avLst/>
-          </a:prstGeom>
-          <a:noFill/>
-        </p:spPr>
-        <p:txBody>
-          <a:bodyPr wrap="square" anchor="t" lIns="0" rIns="0" tIns="0" bIns="0">
-            <a:spAutoFit/>
-          </a:bodyPr>
-          <a:lstStyle/>
-          <a:p>
-            <a:pPr algn="l">
-              <a:lnSpc>
-                <a:spcPct val="128000"/>
-              </a:lnSpc>
-            </a:pPr>
-            <a:r>
-              <a:rPr sz="1300" b="0">
-                <a:solidFill>
-                  <a:srgbClr val="1C2A33"/>
-                </a:solidFill>
-                <a:latin typeface="楷体"/>
-                <a:ea typeface="楷体"/>
-                <a:cs typeface="楷体"/>
-              </a:rPr>
-              <a:t>③ 食物链：生产者→初级→次级消费者…只含生产者和消费者。</a:t>
-            </a:r>
-          </a:p>
-        </p:txBody>
-      </p:sp>
-      <p:sp>
-        <p:nvSpPr>
-          <p:cNvPr id="14" name="Rounded Rectangle 13"/>
+          <p:cNvPr id="19" name="Rectangle 18"/>
           <p:cNvSpPr/>
           <p:nvPr/>
         </p:nvSpPr>
         <p:spPr>
           <a:xfrm>
-            <a:off x="640080" y="5212080"/>
-            <a:ext cx="10911535" cy="1170432"/>
-          </a:xfrm>
-          <a:prstGeom prst="roundRect">
+            <a:off x="6255867" y="4434840"/>
+            <a:ext cx="5295747" cy="457200"/>
+          </a:xfrm>
+          <a:prstGeom prst="rect">
             <a:avLst/>
           </a:prstGeom>
           <a:solidFill>
-            <a:srgbClr val="FFFFFF"/>
+            <a:srgbClr val="6B6258"/>
           </a:solidFill>
-          <a:ln w="22860">
-            <a:solidFill>
-              <a:srgbClr val="C8A86B"/>
-            </a:solidFill>
+          <a:ln>
+            <a:noFill/>
           </a:ln>
           <a:effectLst/>
         </p:spPr>
@@ -5310,14 +5890,14 @@
       </p:sp>
       <p:sp>
         <p:nvSpPr>
-          <p:cNvPr id="15" name="TextBox 14"/>
+          <p:cNvPr id="20" name="TextBox 19"/>
           <p:cNvSpPr txBox="1"/>
           <p:nvPr/>
         </p:nvSpPr>
         <p:spPr>
           <a:xfrm>
-            <a:off x="1371600" y="5321808"/>
-            <a:ext cx="9997135" cy="457200"/>
+            <a:off x="6255867" y="4489704"/>
+            <a:ext cx="5295747" cy="365760"/>
           </a:xfrm>
           <a:prstGeom prst="rect">
             <a:avLst/>
@@ -5330,35 +5910,31 @@
           </a:bodyPr>
           <a:lstStyle/>
           <a:p>
-            <a:pPr algn="l">
-              <a:lnSpc>
-                <a:spcPct val="110000"/>
-              </a:lnSpc>
-            </a:pPr>
-            <a:r>
-              <a:rPr sz="1600" b="1">
-                <a:solidFill>
-                  <a:srgbClr val="1C2A33"/>
+            <a:pPr algn="ctr"/>
+            <a:r>
+              <a:rPr sz="1400" b="1">
+                <a:solidFill>
+                  <a:srgbClr val="FFFFFF"/>
                 </a:solidFill>
                 <a:latin typeface="微软雅黑"/>
                 <a:ea typeface="微软雅黑"/>
                 <a:cs typeface="微软雅黑"/>
               </a:rPr>
-              <a:t/>
-            </a:r>
-          </a:p>
-        </p:txBody>
-      </p:sp>
-      <p:sp>
-        <p:nvSpPr>
-          <p:cNvPr id="16" name="TextBox 15"/>
+              <a:t>重点 4</a:t>
+            </a:r>
+          </a:p>
+        </p:txBody>
+      </p:sp>
+      <p:sp>
+        <p:nvSpPr>
+          <p:cNvPr id="21" name="TextBox 20"/>
           <p:cNvSpPr txBox="1"/>
           <p:nvPr/>
         </p:nvSpPr>
         <p:spPr>
           <a:xfrm>
-            <a:off x="1371600" y="5760720"/>
-            <a:ext cx="9997135" cy="530352"/>
+            <a:off x="6530187" y="5029200"/>
+            <a:ext cx="4747107" cy="1234440"/>
           </a:xfrm>
           <a:prstGeom prst="rect">
             <a:avLst/>
@@ -5373,11 +5949,11 @@
           <a:p>
             <a:pPr algn="l">
               <a:lnSpc>
-                <a:spcPct val="128000"/>
+                <a:spcPct val="150000"/>
               </a:lnSpc>
             </a:pPr>
             <a:r>
-              <a:rPr sz="1300" b="0">
+              <a:rPr sz="1400" b="0">
                 <a:solidFill>
                   <a:srgbClr val="1C2A33"/>
                 </a:solidFill>
@@ -5392,7 +5968,7 @@
       </p:sp>
       <p:sp>
         <p:nvSpPr>
-          <p:cNvPr id="17" name="TextBox 16"/>
+          <p:cNvPr id="22" name="TextBox 21"/>
           <p:cNvSpPr txBox="1"/>
           <p:nvPr/>
         </p:nvSpPr>
@@ -5519,13 +6095,13 @@
             <a:r>
               <a:rPr sz="1300" b="1">
                 <a:solidFill>
-                  <a:srgbClr val="2E7D6B"/>
+                  <a:srgbClr val="C8A86B"/>
                 </a:solidFill>
                 <a:latin typeface="微软雅黑"/>
                 <a:ea typeface="微软雅黑"/>
                 <a:cs typeface="微软雅黑"/>
               </a:rPr>
-              <a:t>学习路径</a:t>
+              <a:t>方法</a:t>
             </a:r>
           </a:p>
         </p:txBody>
@@ -5542,6 +6118,342 @@
             <a:ext cx="822960" cy="30480"/>
           </a:xfrm>
           <a:prstGeom prst="rect">
+            <a:avLst/>
+          </a:prstGeom>
+          <a:solidFill>
+            <a:srgbClr val="C8A86B"/>
+          </a:solidFill>
+          <a:ln>
+            <a:noFill/>
+          </a:ln>
+          <a:effectLst/>
+        </p:spPr>
+        <p:style>
+          <a:lnRef idx="1">
+            <a:schemeClr val="accent1"/>
+          </a:lnRef>
+          <a:fillRef idx="3">
+            <a:schemeClr val="accent1"/>
+          </a:fillRef>
+          <a:effectRef idx="2">
+            <a:schemeClr val="accent1"/>
+          </a:effectRef>
+          <a:fontRef idx="minor">
+            <a:schemeClr val="lt1"/>
+          </a:fontRef>
+        </p:style>
+        <p:txBody>
+          <a:bodyPr rtlCol="0" anchor="ctr"/>
+          <a:lstStyle/>
+          <a:p>
+            <a:pPr algn="ctr"/>
+          </a:p>
+        </p:txBody>
+      </p:sp>
+      <p:sp>
+        <p:nvSpPr>
+          <p:cNvPr id="5" name="TextBox 4"/>
+          <p:cNvSpPr txBox="1"/>
+          <p:nvPr/>
+        </p:nvSpPr>
+        <p:spPr>
+          <a:xfrm>
+            <a:off x="640080" y="1298448"/>
+            <a:ext cx="10789920" cy="640080"/>
+          </a:xfrm>
+          <a:prstGeom prst="rect">
+            <a:avLst/>
+          </a:prstGeom>
+          <a:noFill/>
+        </p:spPr>
+        <p:txBody>
+          <a:bodyPr wrap="square" anchor="t" lIns="0" rIns="0" tIns="0" bIns="0">
+            <a:spAutoFit/>
+          </a:bodyPr>
+          <a:lstStyle/>
+          <a:p>
+            <a:pPr algn="l"/>
+            <a:r>
+              <a:rPr sz="3000" b="1">
+                <a:solidFill>
+                  <a:srgbClr val="1C2A33"/>
+                </a:solidFill>
+                <a:latin typeface="楷体"/>
+                <a:ea typeface="楷体"/>
+                <a:cs typeface="楷体"/>
+              </a:rPr>
+              <a:t>本节课的学习思路</a:t>
+            </a:r>
+          </a:p>
+        </p:txBody>
+      </p:sp>
+      <p:sp>
+        <p:nvSpPr>
+          <p:cNvPr id="6" name="Rounded Rectangle 5"/>
+          <p:cNvSpPr/>
+          <p:nvPr/>
+        </p:nvSpPr>
+        <p:spPr>
+          <a:xfrm>
+            <a:off x="640080" y="2194560"/>
+            <a:ext cx="2453563" cy="3657600"/>
+          </a:xfrm>
+          <a:prstGeom prst="roundRect">
+            <a:avLst/>
+          </a:prstGeom>
+          <a:solidFill>
+            <a:srgbClr val="FFFFFF"/>
+          </a:solidFill>
+          <a:ln w="20320">
+            <a:solidFill>
+              <a:srgbClr val="B23A2A"/>
+            </a:solidFill>
+          </a:ln>
+          <a:effectLst/>
+        </p:spPr>
+        <p:style>
+          <a:lnRef idx="1">
+            <a:schemeClr val="accent1"/>
+          </a:lnRef>
+          <a:fillRef idx="3">
+            <a:schemeClr val="accent1"/>
+          </a:fillRef>
+          <a:effectRef idx="2">
+            <a:schemeClr val="accent1"/>
+          </a:effectRef>
+          <a:fontRef idx="minor">
+            <a:schemeClr val="lt1"/>
+          </a:fontRef>
+        </p:style>
+        <p:txBody>
+          <a:bodyPr rtlCol="0" anchor="ctr"/>
+          <a:lstStyle/>
+          <a:p>
+            <a:pPr algn="ctr"/>
+          </a:p>
+        </p:txBody>
+      </p:sp>
+      <p:sp>
+        <p:nvSpPr>
+          <p:cNvPr id="7" name="Oval 6"/>
+          <p:cNvSpPr/>
+          <p:nvPr/>
+        </p:nvSpPr>
+        <p:spPr>
+          <a:xfrm>
+            <a:off x="1455381" y="2514600"/>
+            <a:ext cx="822960" cy="822960"/>
+          </a:xfrm>
+          <a:prstGeom prst="ellipse">
+            <a:avLst/>
+          </a:prstGeom>
+          <a:solidFill>
+            <a:srgbClr val="B23A2A"/>
+          </a:solidFill>
+          <a:ln>
+            <a:noFill/>
+          </a:ln>
+          <a:effectLst/>
+        </p:spPr>
+        <p:style>
+          <a:lnRef idx="1">
+            <a:schemeClr val="accent1"/>
+          </a:lnRef>
+          <a:fillRef idx="3">
+            <a:schemeClr val="accent1"/>
+          </a:fillRef>
+          <a:effectRef idx="2">
+            <a:schemeClr val="accent1"/>
+          </a:effectRef>
+          <a:fontRef idx="minor">
+            <a:schemeClr val="lt1"/>
+          </a:fontRef>
+        </p:style>
+        <p:txBody>
+          <a:bodyPr rtlCol="0" anchor="ctr"/>
+          <a:lstStyle/>
+          <a:p>
+            <a:pPr algn="ctr"/>
+          </a:p>
+        </p:txBody>
+      </p:sp>
+      <p:sp>
+        <p:nvSpPr>
+          <p:cNvPr id="8" name="TextBox 7"/>
+          <p:cNvSpPr txBox="1"/>
+          <p:nvPr/>
+        </p:nvSpPr>
+        <p:spPr>
+          <a:xfrm>
+            <a:off x="1455381" y="2697480"/>
+            <a:ext cx="822960" cy="457200"/>
+          </a:xfrm>
+          <a:prstGeom prst="rect">
+            <a:avLst/>
+          </a:prstGeom>
+          <a:noFill/>
+        </p:spPr>
+        <p:txBody>
+          <a:bodyPr wrap="square" anchor="t" lIns="0" rIns="0" tIns="0" bIns="0">
+            <a:spAutoFit/>
+          </a:bodyPr>
+          <a:lstStyle/>
+          <a:p>
+            <a:pPr algn="ctr"/>
+            <a:r>
+              <a:rPr sz="2400" b="1">
+                <a:solidFill>
+                  <a:srgbClr val="FFFFFF"/>
+                </a:solidFill>
+                <a:latin typeface="楷体"/>
+                <a:ea typeface="楷体"/>
+                <a:cs typeface="楷体"/>
+              </a:rPr>
+              <a:t>1</a:t>
+            </a:r>
+          </a:p>
+        </p:txBody>
+      </p:sp>
+      <p:sp>
+        <p:nvSpPr>
+          <p:cNvPr id="9" name="TextBox 8"/>
+          <p:cNvSpPr txBox="1"/>
+          <p:nvPr/>
+        </p:nvSpPr>
+        <p:spPr>
+          <a:xfrm>
+            <a:off x="822960" y="3566160"/>
+            <a:ext cx="2087803" cy="1097280"/>
+          </a:xfrm>
+          <a:prstGeom prst="rect">
+            <a:avLst/>
+          </a:prstGeom>
+          <a:noFill/>
+        </p:spPr>
+        <p:txBody>
+          <a:bodyPr wrap="square" anchor="t" lIns="0" rIns="0" tIns="0" bIns="0">
+            <a:spAutoFit/>
+          </a:bodyPr>
+          <a:lstStyle/>
+          <a:p>
+            <a:pPr algn="ctr">
+              <a:lnSpc>
+                <a:spcPct val="125000"/>
+              </a:lnSpc>
+            </a:pPr>
+            <a:r>
+              <a:rPr sz="1600" b="1">
+                <a:solidFill>
+                  <a:srgbClr val="B23A2A"/>
+                </a:solidFill>
+                <a:latin typeface="微软雅黑"/>
+                <a:ea typeface="微软雅黑"/>
+                <a:cs typeface="微软雅黑"/>
+              </a:rPr>
+              <a:t>模型建构法（食物网）</a:t>
+            </a:r>
+          </a:p>
+        </p:txBody>
+      </p:sp>
+      <p:sp>
+        <p:nvSpPr>
+          <p:cNvPr id="10" name="TextBox 9"/>
+          <p:cNvSpPr txBox="1"/>
+          <p:nvPr/>
+        </p:nvSpPr>
+        <p:spPr>
+          <a:xfrm>
+            <a:off x="841248" y="4709160"/>
+            <a:ext cx="2051227" cy="1005840"/>
+          </a:xfrm>
+          <a:prstGeom prst="rect">
+            <a:avLst/>
+          </a:prstGeom>
+          <a:noFill/>
+        </p:spPr>
+        <p:txBody>
+          <a:bodyPr wrap="square" anchor="t" lIns="0" rIns="0" tIns="0" bIns="0">
+            <a:spAutoFit/>
+          </a:bodyPr>
+          <a:lstStyle/>
+          <a:p>
+            <a:pPr algn="ctr">
+              <a:lnSpc>
+                <a:spcPct val="145000"/>
+              </a:lnSpc>
+            </a:pPr>
+            <a:r>
+              <a:rPr sz="1250" b="0">
+                <a:solidFill>
+                  <a:srgbClr val="1C2A33"/>
+                </a:solidFill>
+                <a:latin typeface="楷体"/>
+                <a:ea typeface="楷体"/>
+                <a:cs typeface="楷体"/>
+              </a:rPr>
+              <a:t>动手画一画，让关系看得见、记得牢。</a:t>
+            </a:r>
+          </a:p>
+        </p:txBody>
+      </p:sp>
+      <p:sp>
+        <p:nvSpPr>
+          <p:cNvPr id="11" name="Rounded Rectangle 10"/>
+          <p:cNvSpPr/>
+          <p:nvPr/>
+        </p:nvSpPr>
+        <p:spPr>
+          <a:xfrm>
+            <a:off x="3459403" y="2194560"/>
+            <a:ext cx="2453563" cy="3657600"/>
+          </a:xfrm>
+          <a:prstGeom prst="roundRect">
+            <a:avLst/>
+          </a:prstGeom>
+          <a:solidFill>
+            <a:srgbClr val="FFFFFF"/>
+          </a:solidFill>
+          <a:ln w="20320">
+            <a:solidFill>
+              <a:srgbClr val="2E7D6B"/>
+            </a:solidFill>
+          </a:ln>
+          <a:effectLst/>
+        </p:spPr>
+        <p:style>
+          <a:lnRef idx="1">
+            <a:schemeClr val="accent1"/>
+          </a:lnRef>
+          <a:fillRef idx="3">
+            <a:schemeClr val="accent1"/>
+          </a:fillRef>
+          <a:effectRef idx="2">
+            <a:schemeClr val="accent1"/>
+          </a:effectRef>
+          <a:fontRef idx="minor">
+            <a:schemeClr val="lt1"/>
+          </a:fontRef>
+        </p:style>
+        <p:txBody>
+          <a:bodyPr rtlCol="0" anchor="ctr"/>
+          <a:lstStyle/>
+          <a:p>
+            <a:pPr algn="ctr"/>
+          </a:p>
+        </p:txBody>
+      </p:sp>
+      <p:sp>
+        <p:nvSpPr>
+          <p:cNvPr id="12" name="Oval 11"/>
+          <p:cNvSpPr/>
+          <p:nvPr/>
+        </p:nvSpPr>
+        <p:spPr>
+          <a:xfrm>
+            <a:off x="4274705" y="2514600"/>
+            <a:ext cx="822960" cy="822960"/>
+          </a:xfrm>
+          <a:prstGeom prst="ellipse">
             <a:avLst/>
           </a:prstGeom>
           <a:solidFill>
@@ -5576,14 +6488,133 @@
       </p:sp>
       <p:sp>
         <p:nvSpPr>
-          <p:cNvPr id="5" name="Rounded Rectangle 4"/>
+          <p:cNvPr id="13" name="TextBox 12"/>
+          <p:cNvSpPr txBox="1"/>
+          <p:nvPr/>
+        </p:nvSpPr>
+        <p:spPr>
+          <a:xfrm>
+            <a:off x="4274705" y="2697480"/>
+            <a:ext cx="822960" cy="457200"/>
+          </a:xfrm>
+          <a:prstGeom prst="rect">
+            <a:avLst/>
+          </a:prstGeom>
+          <a:noFill/>
+        </p:spPr>
+        <p:txBody>
+          <a:bodyPr wrap="square" anchor="t" lIns="0" rIns="0" tIns="0" bIns="0">
+            <a:spAutoFit/>
+          </a:bodyPr>
+          <a:lstStyle/>
+          <a:p>
+            <a:pPr algn="ctr"/>
+            <a:r>
+              <a:rPr sz="2400" b="1">
+                <a:solidFill>
+                  <a:srgbClr val="FFFFFF"/>
+                </a:solidFill>
+                <a:latin typeface="楷体"/>
+                <a:ea typeface="楷体"/>
+                <a:cs typeface="楷体"/>
+              </a:rPr>
+              <a:t>2</a:t>
+            </a:r>
+          </a:p>
+        </p:txBody>
+      </p:sp>
+      <p:sp>
+        <p:nvSpPr>
+          <p:cNvPr id="14" name="TextBox 13"/>
+          <p:cNvSpPr txBox="1"/>
+          <p:nvPr/>
+        </p:nvSpPr>
+        <p:spPr>
+          <a:xfrm>
+            <a:off x="3642283" y="3566160"/>
+            <a:ext cx="2087803" cy="1097280"/>
+          </a:xfrm>
+          <a:prstGeom prst="rect">
+            <a:avLst/>
+          </a:prstGeom>
+          <a:noFill/>
+        </p:spPr>
+        <p:txBody>
+          <a:bodyPr wrap="square" anchor="t" lIns="0" rIns="0" tIns="0" bIns="0">
+            <a:spAutoFit/>
+          </a:bodyPr>
+          <a:lstStyle/>
+          <a:p>
+            <a:pPr algn="ctr">
+              <a:lnSpc>
+                <a:spcPct val="125000"/>
+              </a:lnSpc>
+            </a:pPr>
+            <a:r>
+              <a:rPr sz="1600" b="1">
+                <a:solidFill>
+                  <a:srgbClr val="2E7D6B"/>
+                </a:solidFill>
+                <a:latin typeface="微软雅黑"/>
+                <a:ea typeface="微软雅黑"/>
+                <a:cs typeface="微软雅黑"/>
+              </a:rPr>
+              <a:t>反例法（特殊细菌/动物）</a:t>
+            </a:r>
+          </a:p>
+        </p:txBody>
+      </p:sp>
+      <p:sp>
+        <p:nvSpPr>
+          <p:cNvPr id="15" name="TextBox 14"/>
+          <p:cNvSpPr txBox="1"/>
+          <p:nvPr/>
+        </p:nvSpPr>
+        <p:spPr>
+          <a:xfrm>
+            <a:off x="3660571" y="4709160"/>
+            <a:ext cx="2051227" cy="1005840"/>
+          </a:xfrm>
+          <a:prstGeom prst="rect">
+            <a:avLst/>
+          </a:prstGeom>
+          <a:noFill/>
+        </p:spPr>
+        <p:txBody>
+          <a:bodyPr wrap="square" anchor="t" lIns="0" rIns="0" tIns="0" bIns="0">
+            <a:spAutoFit/>
+          </a:bodyPr>
+          <a:lstStyle/>
+          <a:p>
+            <a:pPr algn="ctr">
+              <a:lnSpc>
+                <a:spcPct val="145000"/>
+              </a:lnSpc>
+            </a:pPr>
+            <a:r>
+              <a:rPr sz="1250" b="0">
+                <a:solidFill>
+                  <a:srgbClr val="1C2A33"/>
+                </a:solidFill>
+                <a:latin typeface="楷体"/>
+                <a:ea typeface="楷体"/>
+                <a:cs typeface="楷体"/>
+              </a:rPr>
+              <a:t>按这条思路梳理，把知识变成自己的。</a:t>
+            </a:r>
+          </a:p>
+        </p:txBody>
+      </p:sp>
+      <p:sp>
+        <p:nvSpPr>
+          <p:cNvPr id="16" name="Rounded Rectangle 15"/>
           <p:cNvSpPr/>
           <p:nvPr/>
         </p:nvSpPr>
         <p:spPr>
           <a:xfrm>
-            <a:off x="640080" y="1371600"/>
-            <a:ext cx="10911535" cy="685800"/>
+            <a:off x="6278727" y="2194560"/>
+            <a:ext cx="2453563" cy="3657600"/>
           </a:xfrm>
           <a:prstGeom prst="roundRect">
             <a:avLst/>
@@ -5591,9 +6622,9 @@
           <a:solidFill>
             <a:srgbClr val="FFFFFF"/>
           </a:solidFill>
-          <a:ln w="22860">
+          <a:ln w="20320">
             <a:solidFill>
-              <a:srgbClr val="2E7D6B"/>
+              <a:srgbClr val="C8A86B"/>
             </a:solidFill>
           </a:ln>
           <a:effectLst/>
@@ -5622,20 +6653,20 @@
       </p:sp>
       <p:sp>
         <p:nvSpPr>
-          <p:cNvPr id="6" name="Oval 5"/>
+          <p:cNvPr id="17" name="Oval 16"/>
           <p:cNvSpPr/>
           <p:nvPr/>
         </p:nvSpPr>
         <p:spPr>
           <a:xfrm>
-            <a:off x="804672" y="1536192"/>
-            <a:ext cx="457200" cy="457200"/>
+            <a:off x="7094029" y="2514600"/>
+            <a:ext cx="822960" cy="822960"/>
           </a:xfrm>
           <a:prstGeom prst="ellipse">
             <a:avLst/>
           </a:prstGeom>
           <a:solidFill>
-            <a:srgbClr val="2E7D6B"/>
+            <a:srgbClr val="C8A86B"/>
           </a:solidFill>
           <a:ln>
             <a:noFill/>
@@ -5666,14 +6697,14 @@
       </p:sp>
       <p:sp>
         <p:nvSpPr>
-          <p:cNvPr id="7" name="TextBox 6"/>
+          <p:cNvPr id="18" name="TextBox 17"/>
           <p:cNvSpPr txBox="1"/>
           <p:nvPr/>
         </p:nvSpPr>
         <p:spPr>
           <a:xfrm>
-            <a:off x="804672" y="1591056"/>
-            <a:ext cx="457200" cy="384048"/>
+            <a:off x="7094029" y="2697480"/>
+            <a:ext cx="822960" cy="457200"/>
           </a:xfrm>
           <a:prstGeom prst="rect">
             <a:avLst/>
@@ -5688,29 +6719,70 @@
           <a:p>
             <a:pPr algn="ctr"/>
             <a:r>
+              <a:rPr sz="2400" b="1">
+                <a:solidFill>
+                  <a:srgbClr val="FFFFFF"/>
+                </a:solidFill>
+                <a:latin typeface="楷体"/>
+                <a:ea typeface="楷体"/>
+                <a:cs typeface="楷体"/>
+              </a:rPr>
+              <a:t>3</a:t>
+            </a:r>
+          </a:p>
+        </p:txBody>
+      </p:sp>
+      <p:sp>
+        <p:nvSpPr>
+          <p:cNvPr id="19" name="TextBox 18"/>
+          <p:cNvSpPr txBox="1"/>
+          <p:nvPr/>
+        </p:nvSpPr>
+        <p:spPr>
+          <a:xfrm>
+            <a:off x="6461607" y="3566160"/>
+            <a:ext cx="2087803" cy="1097280"/>
+          </a:xfrm>
+          <a:prstGeom prst="rect">
+            <a:avLst/>
+          </a:prstGeom>
+          <a:noFill/>
+        </p:spPr>
+        <p:txBody>
+          <a:bodyPr wrap="square" anchor="t" lIns="0" rIns="0" tIns="0" bIns="0">
+            <a:spAutoFit/>
+          </a:bodyPr>
+          <a:lstStyle/>
+          <a:p>
+            <a:pPr algn="ctr">
+              <a:lnSpc>
+                <a:spcPct val="125000"/>
+              </a:lnSpc>
+            </a:pPr>
+            <a:r>
               <a:rPr sz="1600" b="1">
                 <a:solidFill>
-                  <a:srgbClr val="FFFFFF"/>
+                  <a:srgbClr val="C8A86B"/>
                 </a:solidFill>
                 <a:latin typeface="微软雅黑"/>
                 <a:ea typeface="微软雅黑"/>
                 <a:cs typeface="微软雅黑"/>
               </a:rPr>
-              <a:t>1</a:t>
-            </a:r>
-          </a:p>
-        </p:txBody>
-      </p:sp>
-      <p:sp>
-        <p:nvSpPr>
-          <p:cNvPr id="8" name="TextBox 7"/>
+              <a:t>图解法</a:t>
+            </a:r>
+          </a:p>
+        </p:txBody>
+      </p:sp>
+      <p:sp>
+        <p:nvSpPr>
+          <p:cNvPr id="20" name="TextBox 19"/>
           <p:cNvSpPr txBox="1"/>
           <p:nvPr/>
         </p:nvSpPr>
         <p:spPr>
           <a:xfrm>
-            <a:off x="1371600" y="1481328"/>
-            <a:ext cx="9997135" cy="484632"/>
+            <a:off x="6479895" y="4709160"/>
+            <a:ext cx="2051227" cy="1005840"/>
           </a:xfrm>
           <a:prstGeom prst="rect">
             <a:avLst/>
@@ -5723,35 +6795,35 @@
           </a:bodyPr>
           <a:lstStyle/>
           <a:p>
-            <a:pPr algn="l">
+            <a:pPr algn="ctr">
               <a:lnSpc>
-                <a:spcPct val="110000"/>
+                <a:spcPct val="145000"/>
               </a:lnSpc>
             </a:pPr>
             <a:r>
-              <a:rPr sz="1600" b="1">
+              <a:rPr sz="1250" b="0">
                 <a:solidFill>
                   <a:srgbClr val="1C2A33"/>
                 </a:solidFill>
-                <a:latin typeface="微软雅黑"/>
-                <a:ea typeface="微软雅黑"/>
-                <a:cs typeface="微软雅黑"/>
+                <a:latin typeface="楷体"/>
+                <a:ea typeface="楷体"/>
+                <a:cs typeface="楷体"/>
               </a:rPr>
-              <a:t>Step 1 导入</a:t>
-            </a:r>
-          </a:p>
-        </p:txBody>
-      </p:sp>
-      <p:sp>
-        <p:nvSpPr>
-          <p:cNvPr id="9" name="Rounded Rectangle 8"/>
+              <a:t>动手画一画，让关系看得见、记得牢。</a:t>
+            </a:r>
+          </a:p>
+        </p:txBody>
+      </p:sp>
+      <p:sp>
+        <p:nvSpPr>
+          <p:cNvPr id="21" name="Rounded Rectangle 20"/>
           <p:cNvSpPr/>
           <p:nvPr/>
         </p:nvSpPr>
         <p:spPr>
           <a:xfrm>
-            <a:off x="640080" y="2194560"/>
-            <a:ext cx="10911535" cy="685800"/>
+            <a:off x="9098051" y="2194560"/>
+            <a:ext cx="2453563" cy="3657600"/>
           </a:xfrm>
           <a:prstGeom prst="roundRect">
             <a:avLst/>
@@ -5759,9 +6831,9 @@
           <a:solidFill>
             <a:srgbClr val="FFFFFF"/>
           </a:solidFill>
-          <a:ln w="22860">
+          <a:ln w="20320">
             <a:solidFill>
-              <a:srgbClr val="2E7D6B"/>
+              <a:srgbClr val="6B6258"/>
             </a:solidFill>
           </a:ln>
           <a:effectLst/>
@@ -5790,20 +6862,20 @@
       </p:sp>
       <p:sp>
         <p:nvSpPr>
-          <p:cNvPr id="10" name="Oval 9"/>
+          <p:cNvPr id="22" name="Oval 21"/>
           <p:cNvSpPr/>
           <p:nvPr/>
         </p:nvSpPr>
         <p:spPr>
           <a:xfrm>
-            <a:off x="804672" y="2359152"/>
-            <a:ext cx="457200" cy="457200"/>
+            <a:off x="9913353" y="2514600"/>
+            <a:ext cx="822960" cy="822960"/>
           </a:xfrm>
           <a:prstGeom prst="ellipse">
             <a:avLst/>
           </a:prstGeom>
           <a:solidFill>
-            <a:srgbClr val="2E7D6B"/>
+            <a:srgbClr val="6B6258"/>
           </a:solidFill>
           <a:ln>
             <a:noFill/>
@@ -5834,14 +6906,14 @@
       </p:sp>
       <p:sp>
         <p:nvSpPr>
-          <p:cNvPr id="11" name="TextBox 10"/>
+          <p:cNvPr id="23" name="TextBox 22"/>
           <p:cNvSpPr txBox="1"/>
           <p:nvPr/>
         </p:nvSpPr>
         <p:spPr>
           <a:xfrm>
-            <a:off x="804672" y="2414016"/>
-            <a:ext cx="457200" cy="384048"/>
+            <a:off x="9913353" y="2697480"/>
+            <a:ext cx="822960" cy="457200"/>
           </a:xfrm>
           <a:prstGeom prst="rect">
             <a:avLst/>
@@ -5856,29 +6928,70 @@
           <a:p>
             <a:pPr algn="ctr"/>
             <a:r>
+              <a:rPr sz="2400" b="1">
+                <a:solidFill>
+                  <a:srgbClr val="FFFFFF"/>
+                </a:solidFill>
+                <a:latin typeface="楷体"/>
+                <a:ea typeface="楷体"/>
+                <a:cs typeface="楷体"/>
+              </a:rPr>
+              <a:t>4</a:t>
+            </a:r>
+          </a:p>
+        </p:txBody>
+      </p:sp>
+      <p:sp>
+        <p:nvSpPr>
+          <p:cNvPr id="24" name="TextBox 23"/>
+          <p:cNvSpPr txBox="1"/>
+          <p:nvPr/>
+        </p:nvSpPr>
+        <p:spPr>
+          <a:xfrm>
+            <a:off x="9280931" y="3566160"/>
+            <a:ext cx="2087803" cy="1097280"/>
+          </a:xfrm>
+          <a:prstGeom prst="rect">
+            <a:avLst/>
+          </a:prstGeom>
+          <a:noFill/>
+        </p:spPr>
+        <p:txBody>
+          <a:bodyPr wrap="square" anchor="t" lIns="0" rIns="0" tIns="0" bIns="0">
+            <a:spAutoFit/>
+          </a:bodyPr>
+          <a:lstStyle/>
+          <a:p>
+            <a:pPr algn="ctr">
+              <a:lnSpc>
+                <a:spcPct val="125000"/>
+              </a:lnSpc>
+            </a:pPr>
+            <a:r>
               <a:rPr sz="1600" b="1">
                 <a:solidFill>
-                  <a:srgbClr val="FFFFFF"/>
+                  <a:srgbClr val="6B6258"/>
                 </a:solidFill>
                 <a:latin typeface="微软雅黑"/>
                 <a:ea typeface="微软雅黑"/>
                 <a:cs typeface="微软雅黑"/>
               </a:rPr>
-              <a:t>2</a:t>
-            </a:r>
-          </a:p>
-        </p:txBody>
-      </p:sp>
-      <p:sp>
-        <p:nvSpPr>
-          <p:cNvPr id="12" name="TextBox 11"/>
+              <a:t>归纳法</a:t>
+            </a:r>
+          </a:p>
+        </p:txBody>
+      </p:sp>
+      <p:sp>
+        <p:nvSpPr>
+          <p:cNvPr id="25" name="TextBox 24"/>
           <p:cNvSpPr txBox="1"/>
           <p:nvPr/>
         </p:nvSpPr>
         <p:spPr>
           <a:xfrm>
-            <a:off x="1371600" y="2304288"/>
-            <a:ext cx="9997135" cy="484632"/>
+            <a:off x="9299219" y="4709160"/>
+            <a:ext cx="2051227" cy="1005840"/>
           </a:xfrm>
           <a:prstGeom prst="rect">
             <a:avLst/>
@@ -5891,700 +7004,28 @@
           </a:bodyPr>
           <a:lstStyle/>
           <a:p>
-            <a:pPr algn="l">
+            <a:pPr algn="ctr">
               <a:lnSpc>
-                <a:spcPct val="110000"/>
+                <a:spcPct val="145000"/>
               </a:lnSpc>
             </a:pPr>
             <a:r>
-              <a:rPr sz="1600" b="1">
+              <a:rPr sz="1250" b="0">
                 <a:solidFill>
                   <a:srgbClr val="1C2A33"/>
                 </a:solidFill>
-                <a:latin typeface="微软雅黑"/>
-                <a:ea typeface="微软雅黑"/>
-                <a:cs typeface="微软雅黑"/>
+                <a:latin typeface="楷体"/>
+                <a:ea typeface="楷体"/>
+                <a:cs typeface="楷体"/>
               </a:rPr>
-              <a:t>Step 2 四成分</a:t>
-            </a:r>
-          </a:p>
-        </p:txBody>
-      </p:sp>
-      <p:sp>
-        <p:nvSpPr>
-          <p:cNvPr id="13" name="Rounded Rectangle 12"/>
-          <p:cNvSpPr/>
-          <p:nvPr/>
-        </p:nvSpPr>
-        <p:spPr>
-          <a:xfrm>
-            <a:off x="640080" y="3017520"/>
-            <a:ext cx="10911535" cy="685800"/>
-          </a:xfrm>
-          <a:prstGeom prst="roundRect">
-            <a:avLst/>
-          </a:prstGeom>
-          <a:solidFill>
-            <a:srgbClr val="FFFFFF"/>
-          </a:solidFill>
-          <a:ln w="22860">
-            <a:solidFill>
-              <a:srgbClr val="2E7D6B"/>
-            </a:solidFill>
-          </a:ln>
-          <a:effectLst/>
-        </p:spPr>
-        <p:style>
-          <a:lnRef idx="1">
-            <a:schemeClr val="accent1"/>
-          </a:lnRef>
-          <a:fillRef idx="3">
-            <a:schemeClr val="accent1"/>
-          </a:fillRef>
-          <a:effectRef idx="2">
-            <a:schemeClr val="accent1"/>
-          </a:effectRef>
-          <a:fontRef idx="minor">
-            <a:schemeClr val="lt1"/>
-          </a:fontRef>
-        </p:style>
-        <p:txBody>
-          <a:bodyPr rtlCol="0" anchor="ctr"/>
-          <a:lstStyle/>
-          <a:p>
-            <a:pPr algn="ctr"/>
-          </a:p>
-        </p:txBody>
-      </p:sp>
-      <p:sp>
-        <p:nvSpPr>
-          <p:cNvPr id="14" name="Oval 13"/>
-          <p:cNvSpPr/>
-          <p:nvPr/>
-        </p:nvSpPr>
-        <p:spPr>
-          <a:xfrm>
-            <a:off x="804672" y="3182112"/>
-            <a:ext cx="457200" cy="457200"/>
-          </a:xfrm>
-          <a:prstGeom prst="ellipse">
-            <a:avLst/>
-          </a:prstGeom>
-          <a:solidFill>
-            <a:srgbClr val="2E7D6B"/>
-          </a:solidFill>
-          <a:ln>
-            <a:noFill/>
-          </a:ln>
-          <a:effectLst/>
-        </p:spPr>
-        <p:style>
-          <a:lnRef idx="1">
-            <a:schemeClr val="accent1"/>
-          </a:lnRef>
-          <a:fillRef idx="3">
-            <a:schemeClr val="accent1"/>
-          </a:fillRef>
-          <a:effectRef idx="2">
-            <a:schemeClr val="accent1"/>
-          </a:effectRef>
-          <a:fontRef idx="minor">
-            <a:schemeClr val="lt1"/>
-          </a:fontRef>
-        </p:style>
-        <p:txBody>
-          <a:bodyPr rtlCol="0" anchor="ctr"/>
-          <a:lstStyle/>
-          <a:p>
-            <a:pPr algn="ctr"/>
-          </a:p>
-        </p:txBody>
-      </p:sp>
-      <p:sp>
-        <p:nvSpPr>
-          <p:cNvPr id="15" name="TextBox 14"/>
-          <p:cNvSpPr txBox="1"/>
-          <p:nvPr/>
-        </p:nvSpPr>
-        <p:spPr>
-          <a:xfrm>
-            <a:off x="804672" y="3236976"/>
-            <a:ext cx="457200" cy="384048"/>
-          </a:xfrm>
-          <a:prstGeom prst="rect">
-            <a:avLst/>
-          </a:prstGeom>
-          <a:noFill/>
-        </p:spPr>
-        <p:txBody>
-          <a:bodyPr wrap="square" anchor="t" lIns="0" rIns="0" tIns="0" bIns="0">
-            <a:spAutoFit/>
-          </a:bodyPr>
-          <a:lstStyle/>
-          <a:p>
-            <a:pPr algn="ctr"/>
-            <a:r>
-              <a:rPr sz="1600" b="1">
-                <a:solidFill>
-                  <a:srgbClr val="FFFFFF"/>
-                </a:solidFill>
-                <a:latin typeface="微软雅黑"/>
-                <a:ea typeface="微软雅黑"/>
-                <a:cs typeface="微软雅黑"/>
-              </a:rPr>
-              <a:t>3</a:t>
-            </a:r>
-          </a:p>
-        </p:txBody>
-      </p:sp>
-      <p:sp>
-        <p:nvSpPr>
-          <p:cNvPr id="16" name="TextBox 15"/>
-          <p:cNvSpPr txBox="1"/>
-          <p:nvPr/>
-        </p:nvSpPr>
-        <p:spPr>
-          <a:xfrm>
-            <a:off x="1371600" y="3127248"/>
-            <a:ext cx="9997135" cy="484632"/>
-          </a:xfrm>
-          <a:prstGeom prst="rect">
-            <a:avLst/>
-          </a:prstGeom>
-          <a:noFill/>
-        </p:spPr>
-        <p:txBody>
-          <a:bodyPr wrap="square" anchor="t" lIns="0" rIns="0" tIns="0" bIns="0">
-            <a:spAutoFit/>
-          </a:bodyPr>
-          <a:lstStyle/>
-          <a:p>
-            <a:pPr algn="l">
-              <a:lnSpc>
-                <a:spcPct val="110000"/>
-              </a:lnSpc>
-            </a:pPr>
-            <a:r>
-              <a:rPr sz="1600" b="1">
-                <a:solidFill>
-                  <a:srgbClr val="1C2A33"/>
-                </a:solidFill>
-                <a:latin typeface="微软雅黑"/>
-                <a:ea typeface="微软雅黑"/>
-                <a:cs typeface="微软雅黑"/>
-              </a:rPr>
-              <a:t>Step 3 生产者</a:t>
-            </a:r>
-          </a:p>
-        </p:txBody>
-      </p:sp>
-      <p:sp>
-        <p:nvSpPr>
-          <p:cNvPr id="17" name="Rounded Rectangle 16"/>
-          <p:cNvSpPr/>
-          <p:nvPr/>
-        </p:nvSpPr>
-        <p:spPr>
-          <a:xfrm>
-            <a:off x="640080" y="3840480"/>
-            <a:ext cx="10911535" cy="685800"/>
-          </a:xfrm>
-          <a:prstGeom prst="roundRect">
-            <a:avLst/>
-          </a:prstGeom>
-          <a:solidFill>
-            <a:srgbClr val="FFFFFF"/>
-          </a:solidFill>
-          <a:ln w="22860">
-            <a:solidFill>
-              <a:srgbClr val="2E7D6B"/>
-            </a:solidFill>
-          </a:ln>
-          <a:effectLst/>
-        </p:spPr>
-        <p:style>
-          <a:lnRef idx="1">
-            <a:schemeClr val="accent1"/>
-          </a:lnRef>
-          <a:fillRef idx="3">
-            <a:schemeClr val="accent1"/>
-          </a:fillRef>
-          <a:effectRef idx="2">
-            <a:schemeClr val="accent1"/>
-          </a:effectRef>
-          <a:fontRef idx="minor">
-            <a:schemeClr val="lt1"/>
-          </a:fontRef>
-        </p:style>
-        <p:txBody>
-          <a:bodyPr rtlCol="0" anchor="ctr"/>
-          <a:lstStyle/>
-          <a:p>
-            <a:pPr algn="ctr"/>
-          </a:p>
-        </p:txBody>
-      </p:sp>
-      <p:sp>
-        <p:nvSpPr>
-          <p:cNvPr id="18" name="Oval 17"/>
-          <p:cNvSpPr/>
-          <p:nvPr/>
-        </p:nvSpPr>
-        <p:spPr>
-          <a:xfrm>
-            <a:off x="804672" y="4005072"/>
-            <a:ext cx="457200" cy="457200"/>
-          </a:xfrm>
-          <a:prstGeom prst="ellipse">
-            <a:avLst/>
-          </a:prstGeom>
-          <a:solidFill>
-            <a:srgbClr val="2E7D6B"/>
-          </a:solidFill>
-          <a:ln>
-            <a:noFill/>
-          </a:ln>
-          <a:effectLst/>
-        </p:spPr>
-        <p:style>
-          <a:lnRef idx="1">
-            <a:schemeClr val="accent1"/>
-          </a:lnRef>
-          <a:fillRef idx="3">
-            <a:schemeClr val="accent1"/>
-          </a:fillRef>
-          <a:effectRef idx="2">
-            <a:schemeClr val="accent1"/>
-          </a:effectRef>
-          <a:fontRef idx="minor">
-            <a:schemeClr val="lt1"/>
-          </a:fontRef>
-        </p:style>
-        <p:txBody>
-          <a:bodyPr rtlCol="0" anchor="ctr"/>
-          <a:lstStyle/>
-          <a:p>
-            <a:pPr algn="ctr"/>
-          </a:p>
-        </p:txBody>
-      </p:sp>
-      <p:sp>
-        <p:nvSpPr>
-          <p:cNvPr id="19" name="TextBox 18"/>
-          <p:cNvSpPr txBox="1"/>
-          <p:nvPr/>
-        </p:nvSpPr>
-        <p:spPr>
-          <a:xfrm>
-            <a:off x="804672" y="4059936"/>
-            <a:ext cx="457200" cy="384048"/>
-          </a:xfrm>
-          <a:prstGeom prst="rect">
-            <a:avLst/>
-          </a:prstGeom>
-          <a:noFill/>
-        </p:spPr>
-        <p:txBody>
-          <a:bodyPr wrap="square" anchor="t" lIns="0" rIns="0" tIns="0" bIns="0">
-            <a:spAutoFit/>
-          </a:bodyPr>
-          <a:lstStyle/>
-          <a:p>
-            <a:pPr algn="ctr"/>
-            <a:r>
-              <a:rPr sz="1600" b="1">
-                <a:solidFill>
-                  <a:srgbClr val="FFFFFF"/>
-                </a:solidFill>
-                <a:latin typeface="微软雅黑"/>
-                <a:ea typeface="微软雅黑"/>
-                <a:cs typeface="微软雅黑"/>
-              </a:rPr>
-              <a:t>4</a:t>
-            </a:r>
-          </a:p>
-        </p:txBody>
-      </p:sp>
-      <p:sp>
-        <p:nvSpPr>
-          <p:cNvPr id="20" name="TextBox 19"/>
-          <p:cNvSpPr txBox="1"/>
-          <p:nvPr/>
-        </p:nvSpPr>
-        <p:spPr>
-          <a:xfrm>
-            <a:off x="1371600" y="3950208"/>
-            <a:ext cx="9997135" cy="484632"/>
-          </a:xfrm>
-          <a:prstGeom prst="rect">
-            <a:avLst/>
-          </a:prstGeom>
-          <a:noFill/>
-        </p:spPr>
-        <p:txBody>
-          <a:bodyPr wrap="square" anchor="t" lIns="0" rIns="0" tIns="0" bIns="0">
-            <a:spAutoFit/>
-          </a:bodyPr>
-          <a:lstStyle/>
-          <a:p>
-            <a:pPr algn="l">
-              <a:lnSpc>
-                <a:spcPct val="110000"/>
-              </a:lnSpc>
-            </a:pPr>
-            <a:r>
-              <a:rPr sz="1600" b="1">
-                <a:solidFill>
-                  <a:srgbClr val="1C2A33"/>
-                </a:solidFill>
-                <a:latin typeface="微软雅黑"/>
-                <a:ea typeface="微软雅黑"/>
-                <a:cs typeface="微软雅黑"/>
-              </a:rPr>
-              <a:t>Step 4 食物链</a:t>
-            </a:r>
-          </a:p>
-        </p:txBody>
-      </p:sp>
-      <p:sp>
-        <p:nvSpPr>
-          <p:cNvPr id="21" name="Rounded Rectangle 20"/>
-          <p:cNvSpPr/>
-          <p:nvPr/>
-        </p:nvSpPr>
-        <p:spPr>
-          <a:xfrm>
-            <a:off x="640080" y="4663440"/>
-            <a:ext cx="10911535" cy="685800"/>
-          </a:xfrm>
-          <a:prstGeom prst="roundRect">
-            <a:avLst/>
-          </a:prstGeom>
-          <a:solidFill>
-            <a:srgbClr val="FFFFFF"/>
-          </a:solidFill>
-          <a:ln w="22860">
-            <a:solidFill>
-              <a:srgbClr val="2E7D6B"/>
-            </a:solidFill>
-          </a:ln>
-          <a:effectLst/>
-        </p:spPr>
-        <p:style>
-          <a:lnRef idx="1">
-            <a:schemeClr val="accent1"/>
-          </a:lnRef>
-          <a:fillRef idx="3">
-            <a:schemeClr val="accent1"/>
-          </a:fillRef>
-          <a:effectRef idx="2">
-            <a:schemeClr val="accent1"/>
-          </a:effectRef>
-          <a:fontRef idx="minor">
-            <a:schemeClr val="lt1"/>
-          </a:fontRef>
-        </p:style>
-        <p:txBody>
-          <a:bodyPr rtlCol="0" anchor="ctr"/>
-          <a:lstStyle/>
-          <a:p>
-            <a:pPr algn="ctr"/>
-          </a:p>
-        </p:txBody>
-      </p:sp>
-      <p:sp>
-        <p:nvSpPr>
-          <p:cNvPr id="22" name="Oval 21"/>
-          <p:cNvSpPr/>
-          <p:nvPr/>
-        </p:nvSpPr>
-        <p:spPr>
-          <a:xfrm>
-            <a:off x="804672" y="4828032"/>
-            <a:ext cx="457200" cy="457200"/>
-          </a:xfrm>
-          <a:prstGeom prst="ellipse">
-            <a:avLst/>
-          </a:prstGeom>
-          <a:solidFill>
-            <a:srgbClr val="2E7D6B"/>
-          </a:solidFill>
-          <a:ln>
-            <a:noFill/>
-          </a:ln>
-          <a:effectLst/>
-        </p:spPr>
-        <p:style>
-          <a:lnRef idx="1">
-            <a:schemeClr val="accent1"/>
-          </a:lnRef>
-          <a:fillRef idx="3">
-            <a:schemeClr val="accent1"/>
-          </a:fillRef>
-          <a:effectRef idx="2">
-            <a:schemeClr val="accent1"/>
-          </a:effectRef>
-          <a:fontRef idx="minor">
-            <a:schemeClr val="lt1"/>
-          </a:fontRef>
-        </p:style>
-        <p:txBody>
-          <a:bodyPr rtlCol="0" anchor="ctr"/>
-          <a:lstStyle/>
-          <a:p>
-            <a:pPr algn="ctr"/>
-          </a:p>
-        </p:txBody>
-      </p:sp>
-      <p:sp>
-        <p:nvSpPr>
-          <p:cNvPr id="23" name="TextBox 22"/>
-          <p:cNvSpPr txBox="1"/>
-          <p:nvPr/>
-        </p:nvSpPr>
-        <p:spPr>
-          <a:xfrm>
-            <a:off x="804672" y="4882896"/>
-            <a:ext cx="457200" cy="384048"/>
-          </a:xfrm>
-          <a:prstGeom prst="rect">
-            <a:avLst/>
-          </a:prstGeom>
-          <a:noFill/>
-        </p:spPr>
-        <p:txBody>
-          <a:bodyPr wrap="square" anchor="t" lIns="0" rIns="0" tIns="0" bIns="0">
-            <a:spAutoFit/>
-          </a:bodyPr>
-          <a:lstStyle/>
-          <a:p>
-            <a:pPr algn="ctr"/>
-            <a:r>
-              <a:rPr sz="1600" b="1">
-                <a:solidFill>
-                  <a:srgbClr val="FFFFFF"/>
-                </a:solidFill>
-                <a:latin typeface="微软雅黑"/>
-                <a:ea typeface="微软雅黑"/>
-                <a:cs typeface="微软雅黑"/>
-              </a:rPr>
-              <a:t>5</a:t>
-            </a:r>
-          </a:p>
-        </p:txBody>
-      </p:sp>
-      <p:sp>
-        <p:nvSpPr>
-          <p:cNvPr id="24" name="TextBox 23"/>
-          <p:cNvSpPr txBox="1"/>
-          <p:nvPr/>
-        </p:nvSpPr>
-        <p:spPr>
-          <a:xfrm>
-            <a:off x="1371600" y="4773168"/>
-            <a:ext cx="9997135" cy="484632"/>
-          </a:xfrm>
-          <a:prstGeom prst="rect">
-            <a:avLst/>
-          </a:prstGeom>
-          <a:noFill/>
-        </p:spPr>
-        <p:txBody>
-          <a:bodyPr wrap="square" anchor="t" lIns="0" rIns="0" tIns="0" bIns="0">
-            <a:spAutoFit/>
-          </a:bodyPr>
-          <a:lstStyle/>
-          <a:p>
-            <a:pPr algn="l">
-              <a:lnSpc>
-                <a:spcPct val="110000"/>
-              </a:lnSpc>
-            </a:pPr>
-            <a:r>
-              <a:rPr sz="1600" b="1">
-                <a:solidFill>
-                  <a:srgbClr val="1C2A33"/>
-                </a:solidFill>
-                <a:latin typeface="微软雅黑"/>
-                <a:ea typeface="微软雅黑"/>
-                <a:cs typeface="微软雅黑"/>
-              </a:rPr>
-              <a:t>Step 5 食物网</a:t>
-            </a:r>
-          </a:p>
-        </p:txBody>
-      </p:sp>
-      <p:sp>
-        <p:nvSpPr>
-          <p:cNvPr id="25" name="Rounded Rectangle 24"/>
-          <p:cNvSpPr/>
-          <p:nvPr/>
-        </p:nvSpPr>
-        <p:spPr>
-          <a:xfrm>
-            <a:off x="640080" y="5486400"/>
-            <a:ext cx="10911535" cy="685800"/>
-          </a:xfrm>
-          <a:prstGeom prst="roundRect">
-            <a:avLst/>
-          </a:prstGeom>
-          <a:solidFill>
-            <a:srgbClr val="FFFFFF"/>
-          </a:solidFill>
-          <a:ln w="22860">
-            <a:solidFill>
-              <a:srgbClr val="2E7D6B"/>
-            </a:solidFill>
-          </a:ln>
-          <a:effectLst/>
-        </p:spPr>
-        <p:style>
-          <a:lnRef idx="1">
-            <a:schemeClr val="accent1"/>
-          </a:lnRef>
-          <a:fillRef idx="3">
-            <a:schemeClr val="accent1"/>
-          </a:fillRef>
-          <a:effectRef idx="2">
-            <a:schemeClr val="accent1"/>
-          </a:effectRef>
-          <a:fontRef idx="minor">
-            <a:schemeClr val="lt1"/>
-          </a:fontRef>
-        </p:style>
-        <p:txBody>
-          <a:bodyPr rtlCol="0" anchor="ctr"/>
-          <a:lstStyle/>
-          <a:p>
-            <a:pPr algn="ctr"/>
-          </a:p>
-        </p:txBody>
-      </p:sp>
-      <p:sp>
-        <p:nvSpPr>
-          <p:cNvPr id="26" name="Oval 25"/>
-          <p:cNvSpPr/>
-          <p:nvPr/>
-        </p:nvSpPr>
-        <p:spPr>
-          <a:xfrm>
-            <a:off x="804672" y="5650992"/>
-            <a:ext cx="457200" cy="457200"/>
-          </a:xfrm>
-          <a:prstGeom prst="ellipse">
-            <a:avLst/>
-          </a:prstGeom>
-          <a:solidFill>
-            <a:srgbClr val="2E7D6B"/>
-          </a:solidFill>
-          <a:ln>
-            <a:noFill/>
-          </a:ln>
-          <a:effectLst/>
-        </p:spPr>
-        <p:style>
-          <a:lnRef idx="1">
-            <a:schemeClr val="accent1"/>
-          </a:lnRef>
-          <a:fillRef idx="3">
-            <a:schemeClr val="accent1"/>
-          </a:fillRef>
-          <a:effectRef idx="2">
-            <a:schemeClr val="accent1"/>
-          </a:effectRef>
-          <a:fontRef idx="minor">
-            <a:schemeClr val="lt1"/>
-          </a:fontRef>
-        </p:style>
-        <p:txBody>
-          <a:bodyPr rtlCol="0" anchor="ctr"/>
-          <a:lstStyle/>
-          <a:p>
-            <a:pPr algn="ctr"/>
-          </a:p>
-        </p:txBody>
-      </p:sp>
-      <p:sp>
-        <p:nvSpPr>
-          <p:cNvPr id="27" name="TextBox 26"/>
-          <p:cNvSpPr txBox="1"/>
-          <p:nvPr/>
-        </p:nvSpPr>
-        <p:spPr>
-          <a:xfrm>
-            <a:off x="804672" y="5705856"/>
-            <a:ext cx="457200" cy="384048"/>
-          </a:xfrm>
-          <a:prstGeom prst="rect">
-            <a:avLst/>
-          </a:prstGeom>
-          <a:noFill/>
-        </p:spPr>
-        <p:txBody>
-          <a:bodyPr wrap="square" anchor="t" lIns="0" rIns="0" tIns="0" bIns="0">
-            <a:spAutoFit/>
-          </a:bodyPr>
-          <a:lstStyle/>
-          <a:p>
-            <a:pPr algn="ctr"/>
-            <a:r>
-              <a:rPr sz="1600" b="1">
-                <a:solidFill>
-                  <a:srgbClr val="FFFFFF"/>
-                </a:solidFill>
-                <a:latin typeface="微软雅黑"/>
-                <a:ea typeface="微软雅黑"/>
-                <a:cs typeface="微软雅黑"/>
-              </a:rPr>
-              <a:t>6</a:t>
-            </a:r>
-          </a:p>
-        </p:txBody>
-      </p:sp>
-      <p:sp>
-        <p:nvSpPr>
-          <p:cNvPr id="28" name="TextBox 27"/>
-          <p:cNvSpPr txBox="1"/>
-          <p:nvPr/>
-        </p:nvSpPr>
-        <p:spPr>
-          <a:xfrm>
-            <a:off x="1371600" y="5596128"/>
-            <a:ext cx="9997135" cy="484632"/>
-          </a:xfrm>
-          <a:prstGeom prst="rect">
-            <a:avLst/>
-          </a:prstGeom>
-          <a:noFill/>
-        </p:spPr>
-        <p:txBody>
-          <a:bodyPr wrap="square" anchor="t" lIns="0" rIns="0" tIns="0" bIns="0">
-            <a:spAutoFit/>
-          </a:bodyPr>
-          <a:lstStyle/>
-          <a:p>
-            <a:pPr algn="l">
-              <a:lnSpc>
-                <a:spcPct val="110000"/>
-              </a:lnSpc>
-            </a:pPr>
-            <a:r>
-              <a:rPr sz="1600" b="1">
-                <a:solidFill>
-                  <a:srgbClr val="1C2A33"/>
-                </a:solidFill>
-                <a:latin typeface="微软雅黑"/>
-                <a:ea typeface="微软雅黑"/>
-                <a:cs typeface="微软雅黑"/>
-              </a:rPr>
-              <a:t>Step 6 练习+作业</a:t>
-            </a:r>
-          </a:p>
-        </p:txBody>
-      </p:sp>
-      <p:sp>
-        <p:nvSpPr>
-          <p:cNvPr id="29" name="TextBox 28"/>
+              <a:t>在交流与追问中，归纳出一般规律。</a:t>
+            </a:r>
+          </a:p>
+        </p:txBody>
+      </p:sp>
+      <p:sp>
+        <p:nvSpPr>
+          <p:cNvPr id="26" name="TextBox 25"/>
           <p:cNvSpPr txBox="1"/>
           <p:nvPr/>
         </p:nvSpPr>
@@ -6717,7 +7158,7 @@
                 <a:ea typeface="微软雅黑"/>
                 <a:cs typeface="微软雅黑"/>
               </a:rPr>
-              <a:t>易混易错</a:t>
+              <a:t>难点</a:t>
             </a:r>
           </a:p>
         </p:txBody>
@@ -6768,14 +7209,51 @@
       </p:sp>
       <p:sp>
         <p:nvSpPr>
-          <p:cNvPr id="5" name="Rounded Rectangle 4"/>
+          <p:cNvPr id="5" name="TextBox 4"/>
+          <p:cNvSpPr txBox="1"/>
+          <p:nvPr/>
+        </p:nvSpPr>
+        <p:spPr>
+          <a:xfrm>
+            <a:off x="640080" y="1298448"/>
+            <a:ext cx="10789920" cy="640080"/>
+          </a:xfrm>
+          <a:prstGeom prst="rect">
+            <a:avLst/>
+          </a:prstGeom>
+          <a:noFill/>
+        </p:spPr>
+        <p:txBody>
+          <a:bodyPr wrap="square" anchor="t" lIns="0" rIns="0" tIns="0" bIns="0">
+            <a:spAutoFit/>
+          </a:bodyPr>
+          <a:lstStyle/>
+          <a:p>
+            <a:pPr algn="l"/>
+            <a:r>
+              <a:rPr sz="3000" b="1">
+                <a:solidFill>
+                  <a:srgbClr val="1C2A33"/>
+                </a:solidFill>
+                <a:latin typeface="楷体"/>
+                <a:ea typeface="楷体"/>
+                <a:cs typeface="楷体"/>
+              </a:rPr>
+              <a:t>三处容易卡住的地方</a:t>
+            </a:r>
+          </a:p>
+        </p:txBody>
+      </p:sp>
+      <p:sp>
+        <p:nvSpPr>
+          <p:cNvPr id="6" name="Rounded Rectangle 5"/>
           <p:cNvSpPr/>
           <p:nvPr/>
         </p:nvSpPr>
         <p:spPr>
           <a:xfrm>
-            <a:off x="640080" y="1417320"/>
-            <a:ext cx="5349240" cy="2057400"/>
+            <a:off x="640080" y="2194560"/>
+            <a:ext cx="3393338" cy="3749039"/>
           </a:xfrm>
           <a:prstGeom prst="roundRect">
             <a:avLst/>
@@ -6783,7 +7261,7 @@
           <a:solidFill>
             <a:srgbClr val="FFFFFF"/>
           </a:solidFill>
-          <a:ln w="22860">
+          <a:ln w="20320">
             <a:solidFill>
               <a:srgbClr val="B23A2A"/>
             </a:solidFill>
@@ -6814,14 +7292,14 @@
       </p:sp>
       <p:sp>
         <p:nvSpPr>
-          <p:cNvPr id="6" name="Oval 5"/>
+          <p:cNvPr id="7" name="Oval 6"/>
           <p:cNvSpPr/>
           <p:nvPr/>
         </p:nvSpPr>
         <p:spPr>
           <a:xfrm>
-            <a:off x="804672" y="1581912"/>
-            <a:ext cx="457200" cy="457200"/>
+            <a:off x="868680" y="2423160"/>
+            <a:ext cx="548640" cy="548640"/>
           </a:xfrm>
           <a:prstGeom prst="ellipse">
             <a:avLst/>
@@ -6858,14 +7336,14 @@
       </p:sp>
       <p:sp>
         <p:nvSpPr>
-          <p:cNvPr id="7" name="TextBox 6"/>
+          <p:cNvPr id="8" name="TextBox 7"/>
           <p:cNvSpPr txBox="1"/>
           <p:nvPr/>
         </p:nvSpPr>
         <p:spPr>
           <a:xfrm>
-            <a:off x="804672" y="1636776"/>
-            <a:ext cx="457200" cy="384048"/>
+            <a:off x="868680" y="2487168"/>
+            <a:ext cx="548640" cy="411480"/>
           </a:xfrm>
           <a:prstGeom prst="rect">
             <a:avLst/>
@@ -6880,7 +7358,7 @@
           <a:p>
             <a:pPr algn="ctr"/>
             <a:r>
-              <a:rPr sz="1600" b="1">
+              <a:rPr sz="2000" b="1">
                 <a:solidFill>
                   <a:srgbClr val="FFFFFF"/>
                 </a:solidFill>
@@ -6888,21 +7366,21 @@
                 <a:ea typeface="微软雅黑"/>
                 <a:cs typeface="微软雅黑"/>
               </a:rPr>
-              <a:t>!</a:t>
-            </a:r>
-          </a:p>
-        </p:txBody>
-      </p:sp>
-      <p:sp>
-        <p:nvSpPr>
-          <p:cNvPr id="8" name="TextBox 7"/>
+              <a:t>1</a:t>
+            </a:r>
+          </a:p>
+        </p:txBody>
+      </p:sp>
+      <p:sp>
+        <p:nvSpPr>
+          <p:cNvPr id="9" name="TextBox 8"/>
           <p:cNvSpPr txBox="1"/>
           <p:nvPr/>
         </p:nvSpPr>
         <p:spPr>
           <a:xfrm>
-            <a:off x="1371600" y="1527048"/>
-            <a:ext cx="4434840" cy="457200"/>
+            <a:off x="1554480" y="2450592"/>
+            <a:ext cx="2296058" cy="731520"/>
           </a:xfrm>
           <a:prstGeom prst="rect">
             <a:avLst/>
@@ -6917,52 +7395,11 @@
           <a:p>
             <a:pPr algn="l">
               <a:lnSpc>
-                <a:spcPct val="110000"/>
+                <a:spcPct val="130000"/>
               </a:lnSpc>
             </a:pPr>
             <a:r>
               <a:rPr sz="1600" b="1">
-                <a:solidFill>
-                  <a:srgbClr val="1C2A33"/>
-                </a:solidFill>
-                <a:latin typeface="微软雅黑"/>
-                <a:ea typeface="微软雅黑"/>
-                <a:cs typeface="微软雅黑"/>
-              </a:rPr>
-              <a:t/>
-            </a:r>
-          </a:p>
-        </p:txBody>
-      </p:sp>
-      <p:sp>
-        <p:nvSpPr>
-          <p:cNvPr id="9" name="TextBox 8"/>
-          <p:cNvSpPr txBox="1"/>
-          <p:nvPr/>
-        </p:nvSpPr>
-        <p:spPr>
-          <a:xfrm>
-            <a:off x="1371600" y="1965960"/>
-            <a:ext cx="4434840" cy="1417320"/>
-          </a:xfrm>
-          <a:prstGeom prst="rect">
-            <a:avLst/>
-          </a:prstGeom>
-          <a:noFill/>
-        </p:spPr>
-        <p:txBody>
-          <a:bodyPr wrap="square" anchor="t" lIns="0" rIns="0" tIns="0" bIns="0">
-            <a:spAutoFit/>
-          </a:bodyPr>
-          <a:lstStyle/>
-          <a:p>
-            <a:pPr algn="l">
-              <a:lnSpc>
-                <a:spcPct val="128000"/>
-              </a:lnSpc>
-            </a:pPr>
-            <a:r>
-              <a:rPr sz="1200" b="0">
                 <a:solidFill>
                   <a:srgbClr val="1C2A33"/>
                 </a:solidFill>
@@ -6970,21 +7407,65 @@
                 <a:ea typeface="楷体"/>
                 <a:cs typeface="楷体"/>
               </a:rPr>
-              <a:t>① 分解者定位。原因：细菌不都是分解者（硝化细菌是生产者），动物不都是消费者（蚯蚓是分解者），需反例。</a:t>
-            </a:r>
-          </a:p>
-        </p:txBody>
-      </p:sp>
-      <p:sp>
-        <p:nvSpPr>
-          <p:cNvPr id="10" name="Rounded Rectangle 9"/>
+              <a:t>分解者定位</a:t>
+            </a:r>
+          </a:p>
+        </p:txBody>
+      </p:sp>
+      <p:sp>
+        <p:nvSpPr>
+          <p:cNvPr id="10" name="TextBox 9"/>
+          <p:cNvSpPr txBox="1"/>
+          <p:nvPr/>
+        </p:nvSpPr>
+        <p:spPr>
+          <a:xfrm>
+            <a:off x="914400" y="3246120"/>
+            <a:ext cx="2844698" cy="2560319"/>
+          </a:xfrm>
+          <a:prstGeom prst="rect">
+            <a:avLst/>
+          </a:prstGeom>
+          <a:noFill/>
+        </p:spPr>
+        <p:txBody>
+          <a:bodyPr wrap="square" anchor="t" lIns="0" rIns="0" tIns="0" bIns="0">
+            <a:spAutoFit/>
+          </a:bodyPr>
+          <a:lstStyle/>
+          <a:p>
+            <a:pPr algn="l">
+              <a:lnSpc>
+                <a:spcPct val="150000"/>
+              </a:lnSpc>
+              <a:spcAft>
+                <a:spcPts val="0"/>
+              </a:spcAft>
+            </a:pPr>
+            <a:r>
+              <a:rPr sz="1350" b="0">
+                <a:solidFill>
+                  <a:srgbClr val="1C2A33"/>
+                </a:solidFill>
+                <a:latin typeface="楷体"/>
+                <a:ea typeface="楷体"/>
+                <a:cs typeface="楷体"/>
+              </a:rPr>
+              <a:t>原因：细菌不都是分解者（硝化细菌是生产者），动物不都是消费者（蚯蚓是分解者），需反例。</a:t>
+            </a:r>
+          </a:p>
+        </p:txBody>
+      </p:sp>
+      <p:sp>
+        <p:nvSpPr>
+          <p:cNvPr id="11" name="Rounded Rectangle 10"/>
           <p:cNvSpPr/>
           <p:nvPr/>
         </p:nvSpPr>
         <p:spPr>
           <a:xfrm>
-            <a:off x="6263640" y="1417320"/>
-            <a:ext cx="5349240" cy="2057400"/>
+            <a:off x="4399178" y="2194560"/>
+            <a:ext cx="3393338" cy="3749039"/>
           </a:xfrm>
           <a:prstGeom prst="roundRect">
             <a:avLst/>
@@ -6992,9 +7473,9 @@
           <a:solidFill>
             <a:srgbClr val="FFFFFF"/>
           </a:solidFill>
-          <a:ln w="22860">
+          <a:ln w="20320">
             <a:solidFill>
-              <a:srgbClr val="B23A2A"/>
+              <a:srgbClr val="2E7D6B"/>
             </a:solidFill>
           </a:ln>
           <a:effectLst/>
@@ -7023,20 +7504,20 @@
       </p:sp>
       <p:sp>
         <p:nvSpPr>
-          <p:cNvPr id="11" name="Oval 10"/>
+          <p:cNvPr id="12" name="Oval 11"/>
           <p:cNvSpPr/>
           <p:nvPr/>
         </p:nvSpPr>
         <p:spPr>
           <a:xfrm>
-            <a:off x="6428232" y="1581912"/>
-            <a:ext cx="457200" cy="457200"/>
+            <a:off x="4627778" y="2423160"/>
+            <a:ext cx="548640" cy="548640"/>
           </a:xfrm>
           <a:prstGeom prst="ellipse">
             <a:avLst/>
           </a:prstGeom>
           <a:solidFill>
-            <a:srgbClr val="B23A2A"/>
+            <a:srgbClr val="2E7D6B"/>
           </a:solidFill>
           <a:ln>
             <a:noFill/>
@@ -7067,14 +7548,14 @@
       </p:sp>
       <p:sp>
         <p:nvSpPr>
-          <p:cNvPr id="12" name="TextBox 11"/>
+          <p:cNvPr id="13" name="TextBox 12"/>
           <p:cNvSpPr txBox="1"/>
           <p:nvPr/>
         </p:nvSpPr>
         <p:spPr>
           <a:xfrm>
-            <a:off x="6428232" y="1636776"/>
-            <a:ext cx="457200" cy="384048"/>
+            <a:off x="4627778" y="2487168"/>
+            <a:ext cx="548640" cy="411480"/>
           </a:xfrm>
           <a:prstGeom prst="rect">
             <a:avLst/>
@@ -7089,7 +7570,7 @@
           <a:p>
             <a:pPr algn="ctr"/>
             <a:r>
-              <a:rPr sz="1600" b="1">
+              <a:rPr sz="2000" b="1">
                 <a:solidFill>
                   <a:srgbClr val="FFFFFF"/>
                 </a:solidFill>
@@ -7097,21 +7578,21 @@
                 <a:ea typeface="微软雅黑"/>
                 <a:cs typeface="微软雅黑"/>
               </a:rPr>
-              <a:t>!</a:t>
-            </a:r>
-          </a:p>
-        </p:txBody>
-      </p:sp>
-      <p:sp>
-        <p:nvSpPr>
-          <p:cNvPr id="13" name="TextBox 12"/>
+              <a:t>2</a:t>
+            </a:r>
+          </a:p>
+        </p:txBody>
+      </p:sp>
+      <p:sp>
+        <p:nvSpPr>
+          <p:cNvPr id="14" name="TextBox 13"/>
           <p:cNvSpPr txBox="1"/>
           <p:nvPr/>
         </p:nvSpPr>
         <p:spPr>
           <a:xfrm>
-            <a:off x="6995160" y="1527048"/>
-            <a:ext cx="4434840" cy="457200"/>
+            <a:off x="5313578" y="2450592"/>
+            <a:ext cx="2296058" cy="731520"/>
           </a:xfrm>
           <a:prstGeom prst="rect">
             <a:avLst/>
@@ -7126,52 +7607,11 @@
           <a:p>
             <a:pPr algn="l">
               <a:lnSpc>
-                <a:spcPct val="110000"/>
+                <a:spcPct val="130000"/>
               </a:lnSpc>
             </a:pPr>
             <a:r>
               <a:rPr sz="1600" b="1">
-                <a:solidFill>
-                  <a:srgbClr val="1C2A33"/>
-                </a:solidFill>
-                <a:latin typeface="微软雅黑"/>
-                <a:ea typeface="微软雅黑"/>
-                <a:cs typeface="微软雅黑"/>
-              </a:rPr>
-              <a:t/>
-            </a:r>
-          </a:p>
-        </p:txBody>
-      </p:sp>
-      <p:sp>
-        <p:nvSpPr>
-          <p:cNvPr id="14" name="TextBox 13"/>
-          <p:cNvSpPr txBox="1"/>
-          <p:nvPr/>
-        </p:nvSpPr>
-        <p:spPr>
-          <a:xfrm>
-            <a:off x="6995160" y="1965960"/>
-            <a:ext cx="4434840" cy="1417320"/>
-          </a:xfrm>
-          <a:prstGeom prst="rect">
-            <a:avLst/>
-          </a:prstGeom>
-          <a:noFill/>
-        </p:spPr>
-        <p:txBody>
-          <a:bodyPr wrap="square" anchor="t" lIns="0" rIns="0" tIns="0" bIns="0">
-            <a:spAutoFit/>
-          </a:bodyPr>
-          <a:lstStyle/>
-          <a:p>
-            <a:pPr algn="l">
-              <a:lnSpc>
-                <a:spcPct val="128000"/>
-              </a:lnSpc>
-            </a:pPr>
-            <a:r>
-              <a:rPr sz="1400" b="0">
                 <a:solidFill>
                   <a:srgbClr val="1C2A33"/>
                 </a:solidFill>
@@ -7179,21 +7619,65 @@
                 <a:ea typeface="楷体"/>
                 <a:cs typeface="楷体"/>
               </a:rPr>
-              <a:t>② 食物链不含分解者。原因：学生易把分解者写进链，需强调。</a:t>
-            </a:r>
-          </a:p>
-        </p:txBody>
-      </p:sp>
-      <p:sp>
-        <p:nvSpPr>
-          <p:cNvPr id="15" name="Rounded Rectangle 14"/>
+              <a:t>食物链不含分解者</a:t>
+            </a:r>
+          </a:p>
+        </p:txBody>
+      </p:sp>
+      <p:sp>
+        <p:nvSpPr>
+          <p:cNvPr id="15" name="TextBox 14"/>
+          <p:cNvSpPr txBox="1"/>
+          <p:nvPr/>
+        </p:nvSpPr>
+        <p:spPr>
+          <a:xfrm>
+            <a:off x="4673498" y="3246120"/>
+            <a:ext cx="2844698" cy="2560319"/>
+          </a:xfrm>
+          <a:prstGeom prst="rect">
+            <a:avLst/>
+          </a:prstGeom>
+          <a:noFill/>
+        </p:spPr>
+        <p:txBody>
+          <a:bodyPr wrap="square" anchor="t" lIns="0" rIns="0" tIns="0" bIns="0">
+            <a:spAutoFit/>
+          </a:bodyPr>
+          <a:lstStyle/>
+          <a:p>
+            <a:pPr algn="l">
+              <a:lnSpc>
+                <a:spcPct val="150000"/>
+              </a:lnSpc>
+              <a:spcAft>
+                <a:spcPts val="0"/>
+              </a:spcAft>
+            </a:pPr>
+            <a:r>
+              <a:rPr sz="1350" b="0">
+                <a:solidFill>
+                  <a:srgbClr val="1C2A33"/>
+                </a:solidFill>
+                <a:latin typeface="楷体"/>
+                <a:ea typeface="楷体"/>
+                <a:cs typeface="楷体"/>
+              </a:rPr>
+              <a:t>原因：学生易把分解者写进链，需强调。</a:t>
+            </a:r>
+          </a:p>
+        </p:txBody>
+      </p:sp>
+      <p:sp>
+        <p:nvSpPr>
+          <p:cNvPr id="16" name="Rounded Rectangle 15"/>
           <p:cNvSpPr/>
           <p:nvPr/>
         </p:nvSpPr>
         <p:spPr>
           <a:xfrm>
-            <a:off x="640080" y="3703320"/>
-            <a:ext cx="5349240" cy="2057400"/>
+            <a:off x="8158276" y="2194560"/>
+            <a:ext cx="3393338" cy="3749039"/>
           </a:xfrm>
           <a:prstGeom prst="roundRect">
             <a:avLst/>
@@ -7201,9 +7685,9 @@
           <a:solidFill>
             <a:srgbClr val="FFFFFF"/>
           </a:solidFill>
-          <a:ln w="22860">
+          <a:ln w="20320">
             <a:solidFill>
-              <a:srgbClr val="B23A2A"/>
+              <a:srgbClr val="C8A86B"/>
             </a:solidFill>
           </a:ln>
           <a:effectLst/>
@@ -7232,20 +7716,20 @@
       </p:sp>
       <p:sp>
         <p:nvSpPr>
-          <p:cNvPr id="16" name="Oval 15"/>
+          <p:cNvPr id="17" name="Oval 16"/>
           <p:cNvSpPr/>
           <p:nvPr/>
         </p:nvSpPr>
         <p:spPr>
           <a:xfrm>
-            <a:off x="804672" y="3867912"/>
-            <a:ext cx="457200" cy="457200"/>
+            <a:off x="8386876" y="2423160"/>
+            <a:ext cx="548640" cy="548640"/>
           </a:xfrm>
           <a:prstGeom prst="ellipse">
             <a:avLst/>
           </a:prstGeom>
           <a:solidFill>
-            <a:srgbClr val="B23A2A"/>
+            <a:srgbClr val="C8A86B"/>
           </a:solidFill>
           <a:ln>
             <a:noFill/>
@@ -7276,14 +7760,14 @@
       </p:sp>
       <p:sp>
         <p:nvSpPr>
-          <p:cNvPr id="17" name="TextBox 16"/>
+          <p:cNvPr id="18" name="TextBox 17"/>
           <p:cNvSpPr txBox="1"/>
           <p:nvPr/>
         </p:nvSpPr>
         <p:spPr>
           <a:xfrm>
-            <a:off x="804672" y="3922776"/>
-            <a:ext cx="457200" cy="384048"/>
+            <a:off x="8386876" y="2487168"/>
+            <a:ext cx="548640" cy="411480"/>
           </a:xfrm>
           <a:prstGeom prst="rect">
             <a:avLst/>
@@ -7298,7 +7782,7 @@
           <a:p>
             <a:pPr algn="ctr"/>
             <a:r>
-              <a:rPr sz="1600" b="1">
+              <a:rPr sz="2000" b="1">
                 <a:solidFill>
                   <a:srgbClr val="FFFFFF"/>
                 </a:solidFill>
@@ -7306,21 +7790,21 @@
                 <a:ea typeface="微软雅黑"/>
                 <a:cs typeface="微软雅黑"/>
               </a:rPr>
-              <a:t>!</a:t>
-            </a:r>
-          </a:p>
-        </p:txBody>
-      </p:sp>
-      <p:sp>
-        <p:nvSpPr>
-          <p:cNvPr id="18" name="TextBox 17"/>
+              <a:t>3</a:t>
+            </a:r>
+          </a:p>
+        </p:txBody>
+      </p:sp>
+      <p:sp>
+        <p:nvSpPr>
+          <p:cNvPr id="19" name="TextBox 18"/>
           <p:cNvSpPr txBox="1"/>
           <p:nvPr/>
         </p:nvSpPr>
         <p:spPr>
           <a:xfrm>
-            <a:off x="1371600" y="3813048"/>
-            <a:ext cx="4434840" cy="457200"/>
+            <a:off x="9072676" y="2450592"/>
+            <a:ext cx="2296058" cy="731520"/>
           </a:xfrm>
           <a:prstGeom prst="rect">
             <a:avLst/>
@@ -7335,52 +7819,11 @@
           <a:p>
             <a:pPr algn="l">
               <a:lnSpc>
-                <a:spcPct val="110000"/>
+                <a:spcPct val="130000"/>
               </a:lnSpc>
             </a:pPr>
             <a:r>
               <a:rPr sz="1600" b="1">
-                <a:solidFill>
-                  <a:srgbClr val="1C2A33"/>
-                </a:solidFill>
-                <a:latin typeface="微软雅黑"/>
-                <a:ea typeface="微软雅黑"/>
-                <a:cs typeface="微软雅黑"/>
-              </a:rPr>
-              <a:t/>
-            </a:r>
-          </a:p>
-        </p:txBody>
-      </p:sp>
-      <p:sp>
-        <p:nvSpPr>
-          <p:cNvPr id="19" name="TextBox 18"/>
-          <p:cNvSpPr txBox="1"/>
-          <p:nvPr/>
-        </p:nvSpPr>
-        <p:spPr>
-          <a:xfrm>
-            <a:off x="1371600" y="4251960"/>
-            <a:ext cx="4434840" cy="1417320"/>
-          </a:xfrm>
-          <a:prstGeom prst="rect">
-            <a:avLst/>
-          </a:prstGeom>
-          <a:noFill/>
-        </p:spPr>
-        <p:txBody>
-          <a:bodyPr wrap="square" anchor="t" lIns="0" rIns="0" tIns="0" bIns="0">
-            <a:spAutoFit/>
-          </a:bodyPr>
-          <a:lstStyle/>
-          <a:p>
-            <a:pPr algn="l">
-              <a:lnSpc>
-                <a:spcPct val="128000"/>
-              </a:lnSpc>
-            </a:pPr>
-            <a:r>
-              <a:rPr sz="1400" b="0">
                 <a:solidFill>
                   <a:srgbClr val="1C2A33"/>
                 </a:solidFill>
@@ -7388,7 +7831,7 @@
                 <a:ea typeface="楷体"/>
                 <a:cs typeface="楷体"/>
               </a:rPr>
-              <a:t>③ 营养级vs消费者级别。原因：初级消费者是第二营养级，易错，需对应。</a:t>
+              <a:t>营养级vs消费者级别</a:t>
             </a:r>
           </a:p>
         </p:txBody>
@@ -7396,6 +7839,50 @@
       <p:sp>
         <p:nvSpPr>
           <p:cNvPr id="20" name="TextBox 19"/>
+          <p:cNvSpPr txBox="1"/>
+          <p:nvPr/>
+        </p:nvSpPr>
+        <p:spPr>
+          <a:xfrm>
+            <a:off x="8432596" y="3246120"/>
+            <a:ext cx="2844698" cy="2560319"/>
+          </a:xfrm>
+          <a:prstGeom prst="rect">
+            <a:avLst/>
+          </a:prstGeom>
+          <a:noFill/>
+        </p:spPr>
+        <p:txBody>
+          <a:bodyPr wrap="square" anchor="t" lIns="0" rIns="0" tIns="0" bIns="0">
+            <a:spAutoFit/>
+          </a:bodyPr>
+          <a:lstStyle/>
+          <a:p>
+            <a:pPr algn="l">
+              <a:lnSpc>
+                <a:spcPct val="150000"/>
+              </a:lnSpc>
+              <a:spcAft>
+                <a:spcPts val="0"/>
+              </a:spcAft>
+            </a:pPr>
+            <a:r>
+              <a:rPr sz="1350" b="0">
+                <a:solidFill>
+                  <a:srgbClr val="1C2A33"/>
+                </a:solidFill>
+                <a:latin typeface="楷体"/>
+                <a:ea typeface="楷体"/>
+                <a:cs typeface="楷体"/>
+              </a:rPr>
+              <a:t>原因：初级消费者是第二营养级，易错，需对应。</a:t>
+            </a:r>
+          </a:p>
+        </p:txBody>
+      </p:sp>
+      <p:sp>
+        <p:nvSpPr>
+          <p:cNvPr id="21" name="TextBox 20"/>
           <p:cNvSpPr txBox="1"/>
           <p:nvPr/>
         </p:nvSpPr>
@@ -7522,13 +8009,13 @@
             <a:r>
               <a:rPr sz="1300" b="1">
                 <a:solidFill>
-                  <a:srgbClr val="C8A86B"/>
+                  <a:srgbClr val="B23A2A"/>
                 </a:solidFill>
                 <a:latin typeface="微软雅黑"/>
                 <a:ea typeface="微软雅黑"/>
                 <a:cs typeface="微软雅黑"/>
               </a:rPr>
-              <a:t>要点板书</a:t>
+              <a:t>板书精华</a:t>
             </a:r>
           </a:p>
         </p:txBody>
@@ -7543,6 +8030,91 @@
           <a:xfrm>
             <a:off x="640080" y="1097280"/>
             <a:ext cx="822960" cy="30480"/>
+          </a:xfrm>
+          <a:prstGeom prst="rect">
+            <a:avLst/>
+          </a:prstGeom>
+          <a:solidFill>
+            <a:srgbClr val="B23A2A"/>
+          </a:solidFill>
+          <a:ln>
+            <a:noFill/>
+          </a:ln>
+          <a:effectLst/>
+        </p:spPr>
+        <p:style>
+          <a:lnRef idx="1">
+            <a:schemeClr val="accent1"/>
+          </a:lnRef>
+          <a:fillRef idx="3">
+            <a:schemeClr val="accent1"/>
+          </a:fillRef>
+          <a:effectRef idx="2">
+            <a:schemeClr val="accent1"/>
+          </a:effectRef>
+          <a:fontRef idx="minor">
+            <a:schemeClr val="lt1"/>
+          </a:fontRef>
+        </p:style>
+        <p:txBody>
+          <a:bodyPr rtlCol="0" anchor="ctr"/>
+          <a:lstStyle/>
+          <a:p>
+            <a:pPr algn="ctr"/>
+          </a:p>
+        </p:txBody>
+      </p:sp>
+      <p:sp>
+        <p:nvSpPr>
+          <p:cNvPr id="5" name="Rounded Rectangle 4"/>
+          <p:cNvSpPr/>
+          <p:nvPr/>
+        </p:nvSpPr>
+        <p:spPr>
+          <a:xfrm>
+            <a:off x="640080" y="1508760"/>
+            <a:ext cx="10911535" cy="4892040"/>
+          </a:xfrm>
+          <a:prstGeom prst="roundRect">
+            <a:avLst/>
+          </a:prstGeom>
+          <a:solidFill>
+            <a:srgbClr val="1C2A33"/>
+          </a:solidFill>
+          <a:effectLst/>
+        </p:spPr>
+        <p:style>
+          <a:lnRef idx="1">
+            <a:schemeClr val="accent1"/>
+          </a:lnRef>
+          <a:fillRef idx="3">
+            <a:schemeClr val="accent1"/>
+          </a:fillRef>
+          <a:effectRef idx="2">
+            <a:schemeClr val="accent1"/>
+          </a:effectRef>
+          <a:fontRef idx="minor">
+            <a:schemeClr val="lt1"/>
+          </a:fontRef>
+        </p:style>
+        <p:txBody>
+          <a:bodyPr rtlCol="0" anchor="ctr"/>
+          <a:lstStyle/>
+          <a:p>
+            <a:pPr algn="ctr"/>
+          </a:p>
+        </p:txBody>
+      </p:sp>
+      <p:sp>
+        <p:nvSpPr>
+          <p:cNvPr id="6" name="Rectangle 5"/>
+          <p:cNvSpPr/>
+          <p:nvPr/>
+        </p:nvSpPr>
+        <p:spPr>
+          <a:xfrm>
+            <a:off x="1005840" y="1828800"/>
+            <a:ext cx="822960" cy="38100"/>
           </a:xfrm>
           <a:prstGeom prst="rect">
             <a:avLst/>
@@ -7579,60 +8151,14 @@
       </p:sp>
       <p:sp>
         <p:nvSpPr>
-          <p:cNvPr id="5" name="Rounded Rectangle 4"/>
-          <p:cNvSpPr/>
-          <p:nvPr/>
-        </p:nvSpPr>
-        <p:spPr>
-          <a:xfrm>
-            <a:off x="640080" y="1417320"/>
-            <a:ext cx="10911535" cy="5394960"/>
-          </a:xfrm>
-          <a:prstGeom prst="roundRect">
-            <a:avLst/>
-          </a:prstGeom>
-          <a:solidFill>
-            <a:srgbClr val="FFFFFF"/>
-          </a:solidFill>
-          <a:ln w="25400">
-            <a:solidFill>
-              <a:srgbClr val="C8A86B"/>
-            </a:solidFill>
-          </a:ln>
-          <a:effectLst/>
-        </p:spPr>
-        <p:style>
-          <a:lnRef idx="1">
-            <a:schemeClr val="accent1"/>
-          </a:lnRef>
-          <a:fillRef idx="3">
-            <a:schemeClr val="accent1"/>
-          </a:fillRef>
-          <a:effectRef idx="2">
-            <a:schemeClr val="accent1"/>
-          </a:effectRef>
-          <a:fontRef idx="minor">
-            <a:schemeClr val="lt1"/>
-          </a:fontRef>
-        </p:style>
-        <p:txBody>
-          <a:bodyPr rtlCol="0" anchor="ctr"/>
-          <a:lstStyle/>
-          <a:p>
-            <a:pPr algn="ctr"/>
-          </a:p>
-        </p:txBody>
-      </p:sp>
-      <p:sp>
-        <p:nvSpPr>
-          <p:cNvPr id="6" name="TextBox 5"/>
+          <p:cNvPr id="7" name="TextBox 6"/>
           <p:cNvSpPr txBox="1"/>
           <p:nvPr/>
         </p:nvSpPr>
         <p:spPr>
           <a:xfrm>
-            <a:off x="914400" y="1554480"/>
-            <a:ext cx="10362895" cy="5120640"/>
+            <a:off x="1005840" y="1965960"/>
+            <a:ext cx="10058400" cy="457200"/>
           </a:xfrm>
           <a:prstGeom prst="rect">
             <a:avLst/>
@@ -7645,41 +8171,68 @@
           </a:bodyPr>
           <a:lstStyle/>
           <a:p>
+            <a:pPr algn="l"/>
+            <a:r>
+              <a:rPr sz="2200" b="1">
+                <a:solidFill>
+                  <a:srgbClr val="C8A86B"/>
+                </a:solidFill>
+                <a:latin typeface="楷体"/>
+                <a:ea typeface="楷体"/>
+                <a:cs typeface="楷体"/>
+              </a:rPr>
+              <a:t>板书精华</a:t>
+            </a:r>
+          </a:p>
+        </p:txBody>
+      </p:sp>
+      <p:sp>
+        <p:nvSpPr>
+          <p:cNvPr id="8" name="TextBox 7"/>
+          <p:cNvSpPr txBox="1"/>
+          <p:nvPr/>
+        </p:nvSpPr>
+        <p:spPr>
+          <a:xfrm>
+            <a:off x="1097280" y="2651760"/>
+            <a:ext cx="9997135" cy="3520440"/>
+          </a:xfrm>
+          <a:prstGeom prst="rect">
+            <a:avLst/>
+          </a:prstGeom>
+          <a:noFill/>
+        </p:spPr>
+        <p:txBody>
+          <a:bodyPr wrap="square" anchor="t" lIns="0" rIns="0" tIns="0" bIns="0">
+            <a:spAutoFit/>
+          </a:bodyPr>
+          <a:lstStyle/>
+          <a:p>
             <a:pPr algn="l">
               <a:lnSpc>
-                <a:spcPct val="110000"/>
+                <a:spcPct val="135000"/>
               </a:lnSpc>
               <a:spcAft>
-                <a:spcPts val="100"/>
+                <a:spcPts val="700"/>
               </a:spcAft>
             </a:pPr>
             <a:r>
-              <a:rPr sz="1300" b="0">
-                <a:solidFill>
-                  <a:srgbClr val="1C2A33"/>
-                </a:solidFill>
-                <a:latin typeface="微软雅黑"/>
-                <a:ea typeface="微软雅黑"/>
-                <a:cs typeface="微软雅黑"/>
+              <a:rPr sz="1550" b="0">
+                <a:solidFill>
+                  <a:srgbClr val="FFFFFF"/>
+                </a:solidFill>
+                <a:latin typeface="楷体"/>
+                <a:ea typeface="楷体"/>
+                <a:cs typeface="楷体"/>
               </a:rPr>
-              <a:t>生态系统的结构
-┌──────────────────┐
-│ =生物群落+环境 │
-│ 四成分: │
-│ 非生物物质能量 │
-│ 生产者(基石) │
-│ 消费者(异养) │
-│ 分解者(腐生) │
-│ 链:生产→消费 │
-│ 网:交错,越复越稳│
-└──────────────────┘</a:t>
-            </a:r>
-          </a:p>
-        </p:txBody>
-      </p:sp>
-      <p:sp>
-        <p:nvSpPr>
-          <p:cNvPr id="7" name="TextBox 6"/>
+              <a:t>生态系统的结构=生物群落+环境四成分:非生物物质能量生产者(基石)消费者(异养)分解者(腐生)链:生产→消费网:交错,越复越稳</a:t>
+            </a:r>
+          </a:p>
+        </p:txBody>
+      </p:sp>
+      <p:sp>
+        <p:nvSpPr>
+          <p:cNvPr id="9" name="TextBox 8"/>
           <p:cNvSpPr txBox="1"/>
           <p:nvPr/>
         </p:nvSpPr>
@@ -7812,7 +8365,7 @@
                 <a:ea typeface="微软雅黑"/>
                 <a:cs typeface="微软雅黑"/>
               </a:rPr>
-              <a:t>分层作业</a:t>
+              <a:t>作业</a:t>
             </a:r>
           </a:p>
         </p:txBody>
@@ -7863,14 +8416,51 @@
       </p:sp>
       <p:sp>
         <p:nvSpPr>
-          <p:cNvPr id="5" name="Rounded Rectangle 4"/>
+          <p:cNvPr id="5" name="TextBox 4"/>
+          <p:cNvSpPr txBox="1"/>
+          <p:nvPr/>
+        </p:nvSpPr>
+        <p:spPr>
+          <a:xfrm>
+            <a:off x="640080" y="1298448"/>
+            <a:ext cx="10789920" cy="640080"/>
+          </a:xfrm>
+          <a:prstGeom prst="rect">
+            <a:avLst/>
+          </a:prstGeom>
+          <a:noFill/>
+        </p:spPr>
+        <p:txBody>
+          <a:bodyPr wrap="square" anchor="t" lIns="0" rIns="0" tIns="0" bIns="0">
+            <a:spAutoFit/>
+          </a:bodyPr>
+          <a:lstStyle/>
+          <a:p>
+            <a:pPr algn="l"/>
+            <a:r>
+              <a:rPr sz="3000" b="1">
+                <a:solidFill>
+                  <a:srgbClr val="1C2A33"/>
+                </a:solidFill>
+                <a:latin typeface="楷体"/>
+                <a:ea typeface="楷体"/>
+                <a:cs typeface="楷体"/>
+              </a:rPr>
+              <a:t>基础 · 提升</a:t>
+            </a:r>
+          </a:p>
+        </p:txBody>
+      </p:sp>
+      <p:sp>
+        <p:nvSpPr>
+          <p:cNvPr id="6" name="Rounded Rectangle 5"/>
           <p:cNvSpPr/>
           <p:nvPr/>
         </p:nvSpPr>
         <p:spPr>
           <a:xfrm>
-            <a:off x="640080" y="1417320"/>
-            <a:ext cx="10911535" cy="1417320"/>
+            <a:off x="640080" y="2194560"/>
+            <a:ext cx="5272887" cy="3657600"/>
           </a:xfrm>
           <a:prstGeom prst="roundRect">
             <a:avLst/>
@@ -7878,7 +8468,175 @@
           <a:solidFill>
             <a:srgbClr val="FFFFFF"/>
           </a:solidFill>
-          <a:ln w="22860">
+          <a:ln w="20320">
+            <a:solidFill>
+              <a:srgbClr val="B23A2A"/>
+            </a:solidFill>
+          </a:ln>
+          <a:effectLst/>
+        </p:spPr>
+        <p:style>
+          <a:lnRef idx="1">
+            <a:schemeClr val="accent1"/>
+          </a:lnRef>
+          <a:fillRef idx="3">
+            <a:schemeClr val="accent1"/>
+          </a:fillRef>
+          <a:effectRef idx="2">
+            <a:schemeClr val="accent1"/>
+          </a:effectRef>
+          <a:fontRef idx="minor">
+            <a:schemeClr val="lt1"/>
+          </a:fontRef>
+        </p:style>
+        <p:txBody>
+          <a:bodyPr rtlCol="0" anchor="ctr"/>
+          <a:lstStyle/>
+          <a:p>
+            <a:pPr algn="ctr"/>
+          </a:p>
+        </p:txBody>
+      </p:sp>
+      <p:sp>
+        <p:nvSpPr>
+          <p:cNvPr id="7" name="Rectangle 6"/>
+          <p:cNvSpPr/>
+          <p:nvPr/>
+        </p:nvSpPr>
+        <p:spPr>
+          <a:xfrm>
+            <a:off x="640080" y="2194560"/>
+            <a:ext cx="5272887" cy="502920"/>
+          </a:xfrm>
+          <a:prstGeom prst="rect">
+            <a:avLst/>
+          </a:prstGeom>
+          <a:solidFill>
+            <a:srgbClr val="B23A2A"/>
+          </a:solidFill>
+          <a:ln>
+            <a:noFill/>
+          </a:ln>
+          <a:effectLst/>
+        </p:spPr>
+        <p:style>
+          <a:lnRef idx="1">
+            <a:schemeClr val="accent1"/>
+          </a:lnRef>
+          <a:fillRef idx="3">
+            <a:schemeClr val="accent1"/>
+          </a:fillRef>
+          <a:effectRef idx="2">
+            <a:schemeClr val="accent1"/>
+          </a:effectRef>
+          <a:fontRef idx="minor">
+            <a:schemeClr val="lt1"/>
+          </a:fontRef>
+        </p:style>
+        <p:txBody>
+          <a:bodyPr rtlCol="0" anchor="ctr"/>
+          <a:lstStyle/>
+          <a:p>
+            <a:pPr algn="ctr"/>
+          </a:p>
+        </p:txBody>
+      </p:sp>
+      <p:sp>
+        <p:nvSpPr>
+          <p:cNvPr id="8" name="TextBox 7"/>
+          <p:cNvSpPr txBox="1"/>
+          <p:nvPr/>
+        </p:nvSpPr>
+        <p:spPr>
+          <a:xfrm>
+            <a:off x="640080" y="2304288"/>
+            <a:ext cx="5272887" cy="365760"/>
+          </a:xfrm>
+          <a:prstGeom prst="rect">
+            <a:avLst/>
+          </a:prstGeom>
+          <a:noFill/>
+        </p:spPr>
+        <p:txBody>
+          <a:bodyPr wrap="square" anchor="t" lIns="0" rIns="0" tIns="0" bIns="0">
+            <a:spAutoFit/>
+          </a:bodyPr>
+          <a:lstStyle/>
+          <a:p>
+            <a:pPr algn="ctr"/>
+            <a:r>
+              <a:rPr sz="1600" b="1">
+                <a:solidFill>
+                  <a:srgbClr val="FFFFFF"/>
+                </a:solidFill>
+                <a:latin typeface="微软雅黑"/>
+                <a:ea typeface="微软雅黑"/>
+                <a:cs typeface="微软雅黑"/>
+              </a:rPr>
+              <a:t>基础 · 必做</a:t>
+            </a:r>
+          </a:p>
+        </p:txBody>
+      </p:sp>
+      <p:sp>
+        <p:nvSpPr>
+          <p:cNvPr id="9" name="TextBox 8"/>
+          <p:cNvSpPr txBox="1"/>
+          <p:nvPr/>
+        </p:nvSpPr>
+        <p:spPr>
+          <a:xfrm>
+            <a:off x="914400" y="2880360"/>
+            <a:ext cx="4724247" cy="2788920"/>
+          </a:xfrm>
+          <a:prstGeom prst="rect">
+            <a:avLst/>
+          </a:prstGeom>
+          <a:noFill/>
+        </p:spPr>
+        <p:txBody>
+          <a:bodyPr wrap="square" anchor="t" lIns="0" rIns="0" tIns="0" bIns="0">
+            <a:spAutoFit/>
+          </a:bodyPr>
+          <a:lstStyle/>
+          <a:p>
+            <a:pPr algn="l">
+              <a:lnSpc>
+                <a:spcPct val="155000"/>
+              </a:lnSpc>
+            </a:pPr>
+            <a:r>
+              <a:rPr sz="1350" b="0">
+                <a:solidFill>
+                  <a:srgbClr val="1C2A33"/>
+                </a:solidFill>
+                <a:latin typeface="楷体"/>
+                <a:ea typeface="楷体"/>
+                <a:cs typeface="楷体"/>
+              </a:rPr>
+              <a:t>【基础作业】1. 生态系统的组成成分包括非生物的物质和能量、____、消费者和____。2. 在"草→虫→蛙→蛇"食物链中，蛙属于第____营养级、____级消费者。</a:t>
+            </a:r>
+          </a:p>
+        </p:txBody>
+      </p:sp>
+      <p:sp>
+        <p:nvSpPr>
+          <p:cNvPr id="10" name="Rounded Rectangle 9"/>
+          <p:cNvSpPr/>
+          <p:nvPr/>
+        </p:nvSpPr>
+        <p:spPr>
+          <a:xfrm>
+            <a:off x="6278727" y="2194560"/>
+            <a:ext cx="5272887" cy="3657600"/>
+          </a:xfrm>
+          <a:prstGeom prst="roundRect">
+            <a:avLst/>
+          </a:prstGeom>
+          <a:solidFill>
+            <a:srgbClr val="FFFFFF"/>
+          </a:solidFill>
+          <a:ln w="20320">
             <a:solidFill>
               <a:srgbClr val="2E7D6B"/>
             </a:solidFill>
@@ -7909,107 +8667,23 @@
       </p:sp>
       <p:sp>
         <p:nvSpPr>
-          <p:cNvPr id="6" name="TextBox 5"/>
-          <p:cNvSpPr txBox="1"/>
-          <p:nvPr/>
-        </p:nvSpPr>
-        <p:spPr>
-          <a:xfrm>
-            <a:off x="1371600" y="1527048"/>
-            <a:ext cx="9997135" cy="457200"/>
-          </a:xfrm>
-          <a:prstGeom prst="rect">
-            <a:avLst/>
-          </a:prstGeom>
-          <a:noFill/>
-        </p:spPr>
-        <p:txBody>
-          <a:bodyPr wrap="square" anchor="t" lIns="0" rIns="0" tIns="0" bIns="0">
-            <a:spAutoFit/>
-          </a:bodyPr>
-          <a:lstStyle/>
-          <a:p>
-            <a:pPr algn="l">
-              <a:lnSpc>
-                <a:spcPct val="110000"/>
-              </a:lnSpc>
-            </a:pPr>
-            <a:r>
-              <a:rPr sz="1600" b="1">
-                <a:solidFill>
-                  <a:srgbClr val="1C2A33"/>
-                </a:solidFill>
-                <a:latin typeface="微软雅黑"/>
-                <a:ea typeface="微软雅黑"/>
-                <a:cs typeface="微软雅黑"/>
-              </a:rPr>
-              <a:t/>
-            </a:r>
-          </a:p>
-        </p:txBody>
-      </p:sp>
-      <p:sp>
-        <p:nvSpPr>
-          <p:cNvPr id="7" name="TextBox 6"/>
-          <p:cNvSpPr txBox="1"/>
-          <p:nvPr/>
-        </p:nvSpPr>
-        <p:spPr>
-          <a:xfrm>
-            <a:off x="1371600" y="1965960"/>
-            <a:ext cx="9997135" cy="777240"/>
-          </a:xfrm>
-          <a:prstGeom prst="rect">
-            <a:avLst/>
-          </a:prstGeom>
-          <a:noFill/>
-        </p:spPr>
-        <p:txBody>
-          <a:bodyPr wrap="square" anchor="t" lIns="0" rIns="0" tIns="0" bIns="0">
-            <a:spAutoFit/>
-          </a:bodyPr>
-          <a:lstStyle/>
-          <a:p>
-            <a:pPr algn="l">
-              <a:lnSpc>
-                <a:spcPct val="128000"/>
-              </a:lnSpc>
-            </a:pPr>
-            <a:r>
-              <a:rPr sz="1100" b="0">
-                <a:solidFill>
-                  <a:srgbClr val="1C2A33"/>
-                </a:solidFill>
-                <a:latin typeface="楷体"/>
-                <a:ea typeface="楷体"/>
-                <a:cs typeface="楷体"/>
-              </a:rPr>
-              <a:t>【基础作业】1. 生态系统的组成成分包括非生物的物质和能量、____、消费者和____。2. 在"草→虫→蛙→蛇"食物链中，蛙属于第____营养级、____级消费者。</a:t>
-            </a:r>
-          </a:p>
-        </p:txBody>
-      </p:sp>
-      <p:sp>
-        <p:nvSpPr>
-          <p:cNvPr id="8" name="Rounded Rectangle 7"/>
+          <p:cNvPr id="11" name="Rectangle 10"/>
           <p:cNvSpPr/>
           <p:nvPr/>
         </p:nvSpPr>
         <p:spPr>
           <a:xfrm>
-            <a:off x="640080" y="2971800"/>
-            <a:ext cx="10911535" cy="1417320"/>
-          </a:xfrm>
-          <a:prstGeom prst="roundRect">
+            <a:off x="6278727" y="2194560"/>
+            <a:ext cx="5272887" cy="502920"/>
+          </a:xfrm>
+          <a:prstGeom prst="rect">
             <a:avLst/>
           </a:prstGeom>
           <a:solidFill>
-            <a:srgbClr val="FFFFFF"/>
+            <a:srgbClr val="2E7D6B"/>
           </a:solidFill>
-          <a:ln w="22860">
-            <a:solidFill>
-              <a:srgbClr val="2E7D6B"/>
-            </a:solidFill>
+          <a:ln>
+            <a:noFill/>
           </a:ln>
           <a:effectLst/>
         </p:spPr>
@@ -8037,14 +8711,14 @@
       </p:sp>
       <p:sp>
         <p:nvSpPr>
-          <p:cNvPr id="9" name="TextBox 8"/>
+          <p:cNvPr id="12" name="TextBox 11"/>
           <p:cNvSpPr txBox="1"/>
           <p:nvPr/>
         </p:nvSpPr>
         <p:spPr>
           <a:xfrm>
-            <a:off x="1371600" y="3081528"/>
-            <a:ext cx="9997135" cy="457200"/>
+            <a:off x="6278727" y="2304288"/>
+            <a:ext cx="5272887" cy="365760"/>
           </a:xfrm>
           <a:prstGeom prst="rect">
             <a:avLst/>
@@ -8057,35 +8731,31 @@
           </a:bodyPr>
           <a:lstStyle/>
           <a:p>
-            <a:pPr algn="l">
-              <a:lnSpc>
-                <a:spcPct val="110000"/>
-              </a:lnSpc>
-            </a:pPr>
+            <a:pPr algn="ctr"/>
             <a:r>
               <a:rPr sz="1600" b="1">
                 <a:solidFill>
-                  <a:srgbClr val="1C2A33"/>
+                  <a:srgbClr val="FFFFFF"/>
                 </a:solidFill>
                 <a:latin typeface="微软雅黑"/>
                 <a:ea typeface="微软雅黑"/>
                 <a:cs typeface="微软雅黑"/>
               </a:rPr>
-              <a:t/>
-            </a:r>
-          </a:p>
-        </p:txBody>
-      </p:sp>
-      <p:sp>
-        <p:nvSpPr>
-          <p:cNvPr id="10" name="TextBox 9"/>
+              <a:t>提升 · 选做</a:t>
+            </a:r>
+          </a:p>
+        </p:txBody>
+      </p:sp>
+      <p:sp>
+        <p:nvSpPr>
+          <p:cNvPr id="13" name="TextBox 12"/>
           <p:cNvSpPr txBox="1"/>
           <p:nvPr/>
         </p:nvSpPr>
         <p:spPr>
           <a:xfrm>
-            <a:off x="1371600" y="3520440"/>
-            <a:ext cx="9997135" cy="777240"/>
+            <a:off x="6553047" y="2880360"/>
+            <a:ext cx="4724247" cy="2788920"/>
           </a:xfrm>
           <a:prstGeom prst="rect">
             <a:avLst/>
@@ -8100,11 +8770,11 @@
           <a:p>
             <a:pPr algn="l">
               <a:lnSpc>
-                <a:spcPct val="128000"/>
+                <a:spcPct val="155000"/>
               </a:lnSpc>
             </a:pPr>
             <a:r>
-              <a:rPr sz="1400" b="0">
+              <a:rPr sz="1350" b="0">
                 <a:solidFill>
                   <a:srgbClr val="1C2A33"/>
                 </a:solidFill>
@@ -8119,7 +8789,7 @@
       </p:sp>
       <p:sp>
         <p:nvSpPr>
-          <p:cNvPr id="11" name="TextBox 10"/>
+          <p:cNvPr id="14" name="TextBox 13"/>
           <p:cNvSpPr txBox="1"/>
           <p:nvPr/>
         </p:nvSpPr>
@@ -8252,7 +8922,7 @@
                 <a:ea typeface="微软雅黑"/>
                 <a:cs typeface="微软雅黑"/>
               </a:rPr>
-              <a:t>本课小结</a:t>
+              <a:t>单元小结</a:t>
             </a:r>
           </a:p>
         </p:txBody>
@@ -8303,14 +8973,216 @@
       </p:sp>
       <p:sp>
         <p:nvSpPr>
-          <p:cNvPr id="5" name="Rectangle 4"/>
+          <p:cNvPr id="5" name="TextBox 4"/>
+          <p:cNvSpPr txBox="1"/>
+          <p:nvPr/>
+        </p:nvSpPr>
+        <p:spPr>
+          <a:xfrm>
+            <a:off x="640080" y="1298448"/>
+            <a:ext cx="10789920" cy="640080"/>
+          </a:xfrm>
+          <a:prstGeom prst="rect">
+            <a:avLst/>
+          </a:prstGeom>
+          <a:noFill/>
+        </p:spPr>
+        <p:txBody>
+          <a:bodyPr wrap="square" anchor="t" lIns="0" rIns="0" tIns="0" bIns="0">
+            <a:spAutoFit/>
+          </a:bodyPr>
+          <a:lstStyle/>
+          <a:p>
+            <a:pPr algn="l"/>
+            <a:r>
+              <a:rPr sz="3000" b="1">
+                <a:solidFill>
+                  <a:srgbClr val="1C2A33"/>
+                </a:solidFill>
+                <a:latin typeface="楷体"/>
+                <a:ea typeface="楷体"/>
+                <a:cs typeface="楷体"/>
+              </a:rPr>
+              <a:t>本单元脉络</a:t>
+            </a:r>
+          </a:p>
+        </p:txBody>
+      </p:sp>
+      <p:sp>
+        <p:nvSpPr>
+          <p:cNvPr id="6" name="Rounded Rectangle 5"/>
           <p:cNvSpPr/>
           <p:nvPr/>
         </p:nvSpPr>
         <p:spPr>
           <a:xfrm>
-            <a:off x="640080" y="1737360"/>
-            <a:ext cx="54864" cy="431800"/>
+            <a:off x="640080" y="2194560"/>
+            <a:ext cx="10911535" cy="1371600"/>
+          </a:xfrm>
+          <a:prstGeom prst="roundRect">
+            <a:avLst/>
+          </a:prstGeom>
+          <a:solidFill>
+            <a:srgbClr val="2E7D6B"/>
+          </a:solidFill>
+          <a:ln w="20320">
+            <a:solidFill>
+              <a:srgbClr val="2E7D6B"/>
+            </a:solidFill>
+          </a:ln>
+          <a:effectLst/>
+        </p:spPr>
+        <p:style>
+          <a:lnRef idx="1">
+            <a:schemeClr val="accent1"/>
+          </a:lnRef>
+          <a:fillRef idx="3">
+            <a:schemeClr val="accent1"/>
+          </a:fillRef>
+          <a:effectRef idx="2">
+            <a:schemeClr val="accent1"/>
+          </a:effectRef>
+          <a:fontRef idx="minor">
+            <a:schemeClr val="lt1"/>
+          </a:fontRef>
+        </p:style>
+        <p:txBody>
+          <a:bodyPr rtlCol="0" anchor="ctr"/>
+          <a:lstStyle/>
+          <a:p>
+            <a:pPr algn="ctr"/>
+          </a:p>
+        </p:txBody>
+      </p:sp>
+      <p:sp>
+        <p:nvSpPr>
+          <p:cNvPr id="7" name="TextBox 6"/>
+          <p:cNvSpPr txBox="1"/>
+          <p:nvPr/>
+        </p:nvSpPr>
+        <p:spPr>
+          <a:xfrm>
+            <a:off x="777240" y="2377440"/>
+            <a:ext cx="10637215" cy="411480"/>
+          </a:xfrm>
+          <a:prstGeom prst="rect">
+            <a:avLst/>
+          </a:prstGeom>
+          <a:noFill/>
+        </p:spPr>
+        <p:txBody>
+          <a:bodyPr wrap="square" anchor="t" lIns="0" rIns="0" tIns="0" bIns="0">
+            <a:spAutoFit/>
+          </a:bodyPr>
+          <a:lstStyle/>
+          <a:p>
+            <a:pPr algn="ctr"/>
+            <a:r>
+              <a:rPr sz="1200" b="0">
+                <a:solidFill>
+                  <a:srgbClr val="FFFFFF"/>
+                </a:solidFill>
+                <a:latin typeface="微软雅黑"/>
+                <a:ea typeface="微软雅黑"/>
+                <a:cs typeface="微软雅黑"/>
+              </a:rPr>
+              <a:t>第1课</a:t>
+            </a:r>
+          </a:p>
+        </p:txBody>
+      </p:sp>
+      <p:sp>
+        <p:nvSpPr>
+          <p:cNvPr id="8" name="TextBox 7"/>
+          <p:cNvSpPr txBox="1"/>
+          <p:nvPr/>
+        </p:nvSpPr>
+        <p:spPr>
+          <a:xfrm>
+            <a:off x="777240" y="2788920"/>
+            <a:ext cx="10637215" cy="685800"/>
+          </a:xfrm>
+          <a:prstGeom prst="rect">
+            <a:avLst/>
+          </a:prstGeom>
+          <a:noFill/>
+        </p:spPr>
+        <p:txBody>
+          <a:bodyPr wrap="square" anchor="t" lIns="0" rIns="0" tIns="0" bIns="0">
+            <a:spAutoFit/>
+          </a:bodyPr>
+          <a:lstStyle/>
+          <a:p>
+            <a:pPr algn="ctr">
+              <a:lnSpc>
+                <a:spcPct val="125000"/>
+              </a:lnSpc>
+            </a:pPr>
+            <a:r>
+              <a:rPr sz="1500" b="1">
+                <a:solidFill>
+                  <a:srgbClr val="FFFFFF"/>
+                </a:solidFill>
+                <a:latin typeface="楷体"/>
+                <a:ea typeface="楷体"/>
+                <a:cs typeface="楷体"/>
+              </a:rPr>
+              <a:t>生态系统的结构</a:t>
+            </a:r>
+          </a:p>
+        </p:txBody>
+      </p:sp>
+      <p:sp>
+        <p:nvSpPr>
+          <p:cNvPr id="9" name="Rounded Rectangle 8"/>
+          <p:cNvSpPr/>
+          <p:nvPr/>
+        </p:nvSpPr>
+        <p:spPr>
+          <a:xfrm>
+            <a:off x="640080" y="3931920"/>
+            <a:ext cx="10911535" cy="1828800"/>
+          </a:xfrm>
+          <a:prstGeom prst="roundRect">
+            <a:avLst/>
+          </a:prstGeom>
+          <a:solidFill>
+            <a:srgbClr val="E7DFD2"/>
+          </a:solidFill>
+          <a:effectLst/>
+        </p:spPr>
+        <p:style>
+          <a:lnRef idx="1">
+            <a:schemeClr val="accent1"/>
+          </a:lnRef>
+          <a:fillRef idx="3">
+            <a:schemeClr val="accent1"/>
+          </a:fillRef>
+          <a:effectRef idx="2">
+            <a:schemeClr val="accent1"/>
+          </a:effectRef>
+          <a:fontRef idx="minor">
+            <a:schemeClr val="lt1"/>
+          </a:fontRef>
+        </p:style>
+        <p:txBody>
+          <a:bodyPr rtlCol="0" anchor="ctr"/>
+          <a:lstStyle/>
+          <a:p>
+            <a:pPr algn="ctr"/>
+          </a:p>
+        </p:txBody>
+      </p:sp>
+      <p:sp>
+        <p:nvSpPr>
+          <p:cNvPr id="10" name="Rectangle 9"/>
+          <p:cNvSpPr/>
+          <p:nvPr/>
+        </p:nvSpPr>
+        <p:spPr>
+          <a:xfrm>
+            <a:off x="960120" y="4160520"/>
+            <a:ext cx="54864" cy="279400"/>
           </a:xfrm>
           <a:prstGeom prst="rect">
             <a:avLst/>
@@ -8347,14 +9219,14 @@
       </p:sp>
       <p:sp>
         <p:nvSpPr>
-          <p:cNvPr id="6" name="TextBox 5"/>
+          <p:cNvPr id="11" name="TextBox 10"/>
           <p:cNvSpPr txBox="1"/>
           <p:nvPr/>
         </p:nvSpPr>
         <p:spPr>
           <a:xfrm>
-            <a:off x="868680" y="1645920"/>
-            <a:ext cx="10682935" cy="2194560"/>
+            <a:off x="1188720" y="4160520"/>
+            <a:ext cx="10088575" cy="1463040"/>
           </a:xfrm>
           <a:prstGeom prst="rect">
             <a:avLst/>
@@ -8366,17 +9238,32 @@
             <a:spAutoFit/>
           </a:bodyPr>
           <a:lstStyle/>
+          <a:p>
+            <a:pPr algn="l">
+              <a:spcAft>
+                <a:spcPts val="500"/>
+              </a:spcAft>
+            </a:pPr>
+            <a:r>
+              <a:rPr sz="1500" b="1">
+                <a:solidFill>
+                  <a:srgbClr val="C8A86B"/>
+                </a:solidFill>
+                <a:latin typeface="微软雅黑"/>
+                <a:ea typeface="微软雅黑"/>
+                <a:cs typeface="微软雅黑"/>
+              </a:rPr>
+              <a:t>单元主旨</a:t>
+            </a:r>
+          </a:p>
           <a:p>
             <a:pPr algn="l">
               <a:lnSpc>
                 <a:spcPct val="150000"/>
               </a:lnSpc>
-              <a:spcAft>
-                <a:spcPts val="1000"/>
-              </a:spcAft>
             </a:pPr>
             <a:r>
-              <a:rPr sz="2200" b="0">
+              <a:rPr sz="1600" b="0">
                 <a:solidFill>
                   <a:srgbClr val="1C2A33"/>
                 </a:solidFill>
@@ -8384,28 +9271,14 @@
                 <a:ea typeface="楷体"/>
                 <a:cs typeface="楷体"/>
               </a:rPr>
-              <a:t>本单元主题：生态系统及其稳定性。把今天学到的方法带进下一篇——自己读、自己想、自己写。</a:t>
-            </a:r>
-          </a:p>
-          <a:p>
-            <a:pPr algn="l"/>
-            <a:r>
-              <a:rPr sz="1600" b="1">
-                <a:solidFill>
-                  <a:srgbClr val="B23A2A"/>
-                </a:solidFill>
-                <a:latin typeface="微软雅黑"/>
-                <a:ea typeface="微软雅黑"/>
-                <a:cs typeface="微软雅黑"/>
-              </a:rPr>
-              <a:t>方法迁移：圈关键信息 → 理事件脉络 → 析人物精神</a:t>
-            </a:r>
-          </a:p>
-        </p:txBody>
-      </p:sp>
-      <p:sp>
-        <p:nvSpPr>
-          <p:cNvPr id="7" name="TextBox 6"/>
+              <a:t>生态系统 = 生物群落 + 无机环境；生产者、消费者、分解者沿食物链传递能量。</a:t>
+            </a:r>
+          </a:p>
+        </p:txBody>
+      </p:sp>
+      <p:sp>
+        <p:nvSpPr>
+          <p:cNvPr id="12" name="TextBox 11"/>
           <p:cNvSpPr txBox="1"/>
           <p:nvPr/>
         </p:nvSpPr>
